--- a/final.pptx
+++ b/final.pptx
@@ -5,20 +5,20 @@
     <p:sldMasterId id="2147483648" r:id="rId1"/>
   </p:sldMasterIdLst>
   <p:sldIdLst>
-    <p:sldId id="256" r:id="rId7"/>
-    <p:sldId id="257" r:id="rId8"/>
-    <p:sldId id="258" r:id="rId9"/>
-    <p:sldId id="259" r:id="rId10"/>
-    <p:sldId id="260" r:id="rId11"/>
-    <p:sldId id="261" r:id="rId12"/>
-    <p:sldId id="262" r:id="rId13"/>
-    <p:sldId id="263" r:id="rId14"/>
-    <p:sldId id="264" r:id="rId15"/>
-    <p:sldId id="265" r:id="rId16"/>
-    <p:sldId id="266" r:id="rId17"/>
-    <p:sldId id="267" r:id="rId18"/>
+    <p:sldId id="256" r:id="rId2"/>
+    <p:sldId id="257" r:id="rId3"/>
+    <p:sldId id="258" r:id="rId4"/>
+    <p:sldId id="259" r:id="rId5"/>
+    <p:sldId id="260" r:id="rId6"/>
+    <p:sldId id="261" r:id="rId7"/>
+    <p:sldId id="262" r:id="rId8"/>
+    <p:sldId id="263" r:id="rId9"/>
+    <p:sldId id="264" r:id="rId10"/>
+    <p:sldId id="265" r:id="rId11"/>
+    <p:sldId id="266" r:id="rId12"/>
+    <p:sldId id="267" r:id="rId13"/>
   </p:sldIdLst>
-  <p:sldSz cx="12188952" cy="6858000" type="screen4x3"/>
+  <p:sldSz cx="12188825" cy="6858000"/>
   <p:notesSz cx="6858000" cy="9144000"/>
   <p:defaultTextStyle>
     <a:defPPr>
@@ -115,6 +115,22 @@
       </a:defRPr>
     </a:lvl9pPr>
   </p:defaultTextStyle>
+  <p:extLst>
+    <p:ext uri="{EFAFB233-063F-42B5-8137-9DF3F51BA10A}">
+      <p15:sldGuideLst xmlns:p15="http://schemas.microsoft.com/office/powerpoint/2012/main">
+        <p15:guide id="1" orient="horz" pos="2160">
+          <p15:clr>
+            <a:srgbClr val="A4A3A4"/>
+          </p15:clr>
+        </p15:guide>
+        <p15:guide id="2" pos="2880">
+          <p15:clr>
+            <a:srgbClr val="A4A3A4"/>
+          </p15:clr>
+        </p15:guide>
+      </p15:sldGuideLst>
+    </p:ext>
+  </p:extLst>
 </p:presentation>
 </file>
 
@@ -156,10 +172,9 @@
           <a:lstStyle/>
           <a:p>
             <a:r>
-              <a:rPr lang="en-US" smtClean="0"/>
+              <a:rPr lang="en-US"/>
               <a:t>Click to edit Master title style</a:t>
             </a:r>
-            <a:endParaRPr lang="en-US"/>
           </a:p>
         </p:txBody>
       </p:sp>
@@ -275,10 +290,9 @@
           </a:lstStyle>
           <a:p>
             <a:r>
-              <a:rPr lang="en-US" smtClean="0"/>
+              <a:rPr lang="en-US"/>
               <a:t>Click to edit Master subtitle style</a:t>
             </a:r>
-            <a:endParaRPr lang="en-US"/>
           </a:p>
         </p:txBody>
       </p:sp>
@@ -299,7 +313,7 @@
           <a:p>
             <a:fld id="{5BCAD085-E8A6-8845-BD4E-CB4CCA059FC4}" type="datetimeFigureOut">
               <a:rPr lang="en-US" smtClean="0"/>
-              <a:t>1/27/13</a:t>
+              <a:t>4/29/2026</a:t>
             </a:fld>
             <a:endParaRPr lang="en-US"/>
           </a:p>
@@ -393,10 +407,9 @@
           <a:lstStyle/>
           <a:p>
             <a:r>
-              <a:rPr lang="en-US" smtClean="0"/>
+              <a:rPr lang="en-US"/>
               <a:t>Click to edit Master title style</a:t>
             </a:r>
-            <a:endParaRPr lang="en-US"/>
           </a:p>
         </p:txBody>
       </p:sp>
@@ -417,38 +430,37 @@
           <a:p>
             <a:pPr lvl="0"/>
             <a:r>
-              <a:rPr lang="en-US" smtClean="0"/>
+              <a:rPr lang="en-US"/>
               <a:t>Click to edit Master text styles</a:t>
             </a:r>
           </a:p>
           <a:p>
             <a:pPr lvl="1"/>
             <a:r>
-              <a:rPr lang="en-US" smtClean="0"/>
+              <a:rPr lang="en-US"/>
               <a:t>Second level</a:t>
             </a:r>
           </a:p>
           <a:p>
             <a:pPr lvl="2"/>
             <a:r>
-              <a:rPr lang="en-US" smtClean="0"/>
+              <a:rPr lang="en-US"/>
               <a:t>Third level</a:t>
             </a:r>
           </a:p>
           <a:p>
             <a:pPr lvl="3"/>
             <a:r>
-              <a:rPr lang="en-US" smtClean="0"/>
+              <a:rPr lang="en-US"/>
               <a:t>Fourth level</a:t>
             </a:r>
           </a:p>
           <a:p>
             <a:pPr lvl="4"/>
             <a:r>
-              <a:rPr lang="en-US" smtClean="0"/>
+              <a:rPr lang="en-US"/>
               <a:t>Fifth level</a:t>
             </a:r>
-            <a:endParaRPr lang="en-US"/>
           </a:p>
         </p:txBody>
       </p:sp>
@@ -469,7 +481,7 @@
           <a:p>
             <a:fld id="{5BCAD085-E8A6-8845-BD4E-CB4CCA059FC4}" type="datetimeFigureOut">
               <a:rPr lang="en-US" smtClean="0"/>
-              <a:t>1/27/13</a:t>
+              <a:t>4/29/2026</a:t>
             </a:fld>
             <a:endParaRPr lang="en-US"/>
           </a:p>
@@ -568,10 +580,9 @@
           <a:lstStyle/>
           <a:p>
             <a:r>
-              <a:rPr lang="en-US" smtClean="0"/>
+              <a:rPr lang="en-US"/>
               <a:t>Click to edit Master title style</a:t>
             </a:r>
-            <a:endParaRPr lang="en-US"/>
           </a:p>
         </p:txBody>
       </p:sp>
@@ -597,38 +608,37 @@
           <a:p>
             <a:pPr lvl="0"/>
             <a:r>
-              <a:rPr lang="en-US" smtClean="0"/>
+              <a:rPr lang="en-US"/>
               <a:t>Click to edit Master text styles</a:t>
             </a:r>
           </a:p>
           <a:p>
             <a:pPr lvl="1"/>
             <a:r>
-              <a:rPr lang="en-US" smtClean="0"/>
+              <a:rPr lang="en-US"/>
               <a:t>Second level</a:t>
             </a:r>
           </a:p>
           <a:p>
             <a:pPr lvl="2"/>
             <a:r>
-              <a:rPr lang="en-US" smtClean="0"/>
+              <a:rPr lang="en-US"/>
               <a:t>Third level</a:t>
             </a:r>
           </a:p>
           <a:p>
             <a:pPr lvl="3"/>
             <a:r>
-              <a:rPr lang="en-US" smtClean="0"/>
+              <a:rPr lang="en-US"/>
               <a:t>Fourth level</a:t>
             </a:r>
           </a:p>
           <a:p>
             <a:pPr lvl="4"/>
             <a:r>
-              <a:rPr lang="en-US" smtClean="0"/>
+              <a:rPr lang="en-US"/>
               <a:t>Fifth level</a:t>
             </a:r>
-            <a:endParaRPr lang="en-US"/>
           </a:p>
         </p:txBody>
       </p:sp>
@@ -649,7 +659,7 @@
           <a:p>
             <a:fld id="{5BCAD085-E8A6-8845-BD4E-CB4CCA059FC4}" type="datetimeFigureOut">
               <a:rPr lang="en-US" smtClean="0"/>
-              <a:t>1/27/13</a:t>
+              <a:t>4/29/2026</a:t>
             </a:fld>
             <a:endParaRPr lang="en-US"/>
           </a:p>
@@ -743,10 +753,9 @@
           <a:lstStyle/>
           <a:p>
             <a:r>
-              <a:rPr lang="en-US" smtClean="0"/>
+              <a:rPr lang="en-US"/>
               <a:t>Click to edit Master title style</a:t>
             </a:r>
-            <a:endParaRPr lang="en-US"/>
           </a:p>
         </p:txBody>
       </p:sp>
@@ -767,38 +776,37 @@
           <a:p>
             <a:pPr lvl="0"/>
             <a:r>
-              <a:rPr lang="en-US" smtClean="0"/>
+              <a:rPr lang="en-US"/>
               <a:t>Click to edit Master text styles</a:t>
             </a:r>
           </a:p>
           <a:p>
             <a:pPr lvl="1"/>
             <a:r>
-              <a:rPr lang="en-US" smtClean="0"/>
+              <a:rPr lang="en-US"/>
               <a:t>Second level</a:t>
             </a:r>
           </a:p>
           <a:p>
             <a:pPr lvl="2"/>
             <a:r>
-              <a:rPr lang="en-US" smtClean="0"/>
+              <a:rPr lang="en-US"/>
               <a:t>Third level</a:t>
             </a:r>
           </a:p>
           <a:p>
             <a:pPr lvl="3"/>
             <a:r>
-              <a:rPr lang="en-US" smtClean="0"/>
+              <a:rPr lang="en-US"/>
               <a:t>Fourth level</a:t>
             </a:r>
           </a:p>
           <a:p>
             <a:pPr lvl="4"/>
             <a:r>
-              <a:rPr lang="en-US" smtClean="0"/>
+              <a:rPr lang="en-US"/>
               <a:t>Fifth level</a:t>
             </a:r>
-            <a:endParaRPr lang="en-US"/>
           </a:p>
         </p:txBody>
       </p:sp>
@@ -819,7 +827,7 @@
           <a:p>
             <a:fld id="{5BCAD085-E8A6-8845-BD4E-CB4CCA059FC4}" type="datetimeFigureOut">
               <a:rPr lang="en-US" smtClean="0"/>
-              <a:t>1/27/13</a:t>
+              <a:t>4/29/2026</a:t>
             </a:fld>
             <a:endParaRPr lang="en-US"/>
           </a:p>
@@ -922,10 +930,9 @@
           </a:lstStyle>
           <a:p>
             <a:r>
-              <a:rPr lang="en-US" smtClean="0"/>
+              <a:rPr lang="en-US"/>
               <a:t>Click to edit Master title style</a:t>
             </a:r>
-            <a:endParaRPr lang="en-US"/>
           </a:p>
         </p:txBody>
       </p:sp>
@@ -1042,7 +1049,7 @@
           <a:p>
             <a:pPr lvl="0"/>
             <a:r>
-              <a:rPr lang="en-US" smtClean="0"/>
+              <a:rPr lang="en-US"/>
               <a:t>Click to edit Master text styles</a:t>
             </a:r>
           </a:p>
@@ -1065,7 +1072,7 @@
           <a:p>
             <a:fld id="{5BCAD085-E8A6-8845-BD4E-CB4CCA059FC4}" type="datetimeFigureOut">
               <a:rPr lang="en-US" smtClean="0"/>
-              <a:t>1/27/13</a:t>
+              <a:t>4/29/2026</a:t>
             </a:fld>
             <a:endParaRPr lang="en-US"/>
           </a:p>
@@ -1159,10 +1166,9 @@
           <a:lstStyle/>
           <a:p>
             <a:r>
-              <a:rPr lang="en-US" smtClean="0"/>
+              <a:rPr lang="en-US"/>
               <a:t>Click to edit Master title style</a:t>
             </a:r>
-            <a:endParaRPr lang="en-US"/>
           </a:p>
         </p:txBody>
       </p:sp>
@@ -1216,38 +1222,37 @@
           <a:p>
             <a:pPr lvl="0"/>
             <a:r>
-              <a:rPr lang="en-US" smtClean="0"/>
+              <a:rPr lang="en-US"/>
               <a:t>Click to edit Master text styles</a:t>
             </a:r>
           </a:p>
           <a:p>
             <a:pPr lvl="1"/>
             <a:r>
-              <a:rPr lang="en-US" smtClean="0"/>
+              <a:rPr lang="en-US"/>
               <a:t>Second level</a:t>
             </a:r>
           </a:p>
           <a:p>
             <a:pPr lvl="2"/>
             <a:r>
-              <a:rPr lang="en-US" smtClean="0"/>
+              <a:rPr lang="en-US"/>
               <a:t>Third level</a:t>
             </a:r>
           </a:p>
           <a:p>
             <a:pPr lvl="3"/>
             <a:r>
-              <a:rPr lang="en-US" smtClean="0"/>
+              <a:rPr lang="en-US"/>
               <a:t>Fourth level</a:t>
             </a:r>
           </a:p>
           <a:p>
             <a:pPr lvl="4"/>
             <a:r>
-              <a:rPr lang="en-US" smtClean="0"/>
+              <a:rPr lang="en-US"/>
               <a:t>Fifth level</a:t>
             </a:r>
-            <a:endParaRPr lang="en-US"/>
           </a:p>
         </p:txBody>
       </p:sp>
@@ -1301,38 +1306,37 @@
           <a:p>
             <a:pPr lvl="0"/>
             <a:r>
-              <a:rPr lang="en-US" smtClean="0"/>
+              <a:rPr lang="en-US"/>
               <a:t>Click to edit Master text styles</a:t>
             </a:r>
           </a:p>
           <a:p>
             <a:pPr lvl="1"/>
             <a:r>
-              <a:rPr lang="en-US" smtClean="0"/>
+              <a:rPr lang="en-US"/>
               <a:t>Second level</a:t>
             </a:r>
           </a:p>
           <a:p>
             <a:pPr lvl="2"/>
             <a:r>
-              <a:rPr lang="en-US" smtClean="0"/>
+              <a:rPr lang="en-US"/>
               <a:t>Third level</a:t>
             </a:r>
           </a:p>
           <a:p>
             <a:pPr lvl="3"/>
             <a:r>
-              <a:rPr lang="en-US" smtClean="0"/>
+              <a:rPr lang="en-US"/>
               <a:t>Fourth level</a:t>
             </a:r>
           </a:p>
           <a:p>
             <a:pPr lvl="4"/>
             <a:r>
-              <a:rPr lang="en-US" smtClean="0"/>
+              <a:rPr lang="en-US"/>
               <a:t>Fifth level</a:t>
             </a:r>
-            <a:endParaRPr lang="en-US"/>
           </a:p>
         </p:txBody>
       </p:sp>
@@ -1353,7 +1357,7 @@
           <a:p>
             <a:fld id="{5BCAD085-E8A6-8845-BD4E-CB4CCA059FC4}" type="datetimeFigureOut">
               <a:rPr lang="en-US" smtClean="0"/>
-              <a:t>1/27/13</a:t>
+              <a:t>4/29/2026</a:t>
             </a:fld>
             <a:endParaRPr lang="en-US"/>
           </a:p>
@@ -1451,10 +1455,9 @@
           </a:lstStyle>
           <a:p>
             <a:r>
-              <a:rPr lang="en-US" smtClean="0"/>
+              <a:rPr lang="en-US"/>
               <a:t>Click to edit Master title style</a:t>
             </a:r>
-            <a:endParaRPr lang="en-US"/>
           </a:p>
         </p:txBody>
       </p:sp>
@@ -1517,7 +1520,7 @@
           <a:p>
             <a:pPr lvl="0"/>
             <a:r>
-              <a:rPr lang="en-US" smtClean="0"/>
+              <a:rPr lang="en-US"/>
               <a:t>Click to edit Master text styles</a:t>
             </a:r>
           </a:p>
@@ -1573,38 +1576,37 @@
           <a:p>
             <a:pPr lvl="0"/>
             <a:r>
-              <a:rPr lang="en-US" smtClean="0"/>
+              <a:rPr lang="en-US"/>
               <a:t>Click to edit Master text styles</a:t>
             </a:r>
           </a:p>
           <a:p>
             <a:pPr lvl="1"/>
             <a:r>
-              <a:rPr lang="en-US" smtClean="0"/>
+              <a:rPr lang="en-US"/>
               <a:t>Second level</a:t>
             </a:r>
           </a:p>
           <a:p>
             <a:pPr lvl="2"/>
             <a:r>
-              <a:rPr lang="en-US" smtClean="0"/>
+              <a:rPr lang="en-US"/>
               <a:t>Third level</a:t>
             </a:r>
           </a:p>
           <a:p>
             <a:pPr lvl="3"/>
             <a:r>
-              <a:rPr lang="en-US" smtClean="0"/>
+              <a:rPr lang="en-US"/>
               <a:t>Fourth level</a:t>
             </a:r>
           </a:p>
           <a:p>
             <a:pPr lvl="4"/>
             <a:r>
-              <a:rPr lang="en-US" smtClean="0"/>
+              <a:rPr lang="en-US"/>
               <a:t>Fifth level</a:t>
             </a:r>
-            <a:endParaRPr lang="en-US"/>
           </a:p>
         </p:txBody>
       </p:sp>
@@ -1667,7 +1669,7 @@
           <a:p>
             <a:pPr lvl="0"/>
             <a:r>
-              <a:rPr lang="en-US" smtClean="0"/>
+              <a:rPr lang="en-US"/>
               <a:t>Click to edit Master text styles</a:t>
             </a:r>
           </a:p>
@@ -1723,38 +1725,37 @@
           <a:p>
             <a:pPr lvl="0"/>
             <a:r>
-              <a:rPr lang="en-US" smtClean="0"/>
+              <a:rPr lang="en-US"/>
               <a:t>Click to edit Master text styles</a:t>
             </a:r>
           </a:p>
           <a:p>
             <a:pPr lvl="1"/>
             <a:r>
-              <a:rPr lang="en-US" smtClean="0"/>
+              <a:rPr lang="en-US"/>
               <a:t>Second level</a:t>
             </a:r>
           </a:p>
           <a:p>
             <a:pPr lvl="2"/>
             <a:r>
-              <a:rPr lang="en-US" smtClean="0"/>
+              <a:rPr lang="en-US"/>
               <a:t>Third level</a:t>
             </a:r>
           </a:p>
           <a:p>
             <a:pPr lvl="3"/>
             <a:r>
-              <a:rPr lang="en-US" smtClean="0"/>
+              <a:rPr lang="en-US"/>
               <a:t>Fourth level</a:t>
             </a:r>
           </a:p>
           <a:p>
             <a:pPr lvl="4"/>
             <a:r>
-              <a:rPr lang="en-US" smtClean="0"/>
+              <a:rPr lang="en-US"/>
               <a:t>Fifth level</a:t>
             </a:r>
-            <a:endParaRPr lang="en-US"/>
           </a:p>
         </p:txBody>
       </p:sp>
@@ -1775,7 +1776,7 @@
           <a:p>
             <a:fld id="{5BCAD085-E8A6-8845-BD4E-CB4CCA059FC4}" type="datetimeFigureOut">
               <a:rPr lang="en-US" smtClean="0"/>
-              <a:t>1/27/13</a:t>
+              <a:t>4/29/2026</a:t>
             </a:fld>
             <a:endParaRPr lang="en-US"/>
           </a:p>
@@ -1869,10 +1870,9 @@
           <a:lstStyle/>
           <a:p>
             <a:r>
-              <a:rPr lang="en-US" smtClean="0"/>
+              <a:rPr lang="en-US"/>
               <a:t>Click to edit Master title style</a:t>
             </a:r>
-            <a:endParaRPr lang="en-US"/>
           </a:p>
         </p:txBody>
       </p:sp>
@@ -1893,7 +1893,7 @@
           <a:p>
             <a:fld id="{5BCAD085-E8A6-8845-BD4E-CB4CCA059FC4}" type="datetimeFigureOut">
               <a:rPr lang="en-US" smtClean="0"/>
-              <a:t>1/27/13</a:t>
+              <a:t>4/29/2026</a:t>
             </a:fld>
             <a:endParaRPr lang="en-US"/>
           </a:p>
@@ -1988,7 +1988,7 @@
           <a:p>
             <a:fld id="{5BCAD085-E8A6-8845-BD4E-CB4CCA059FC4}" type="datetimeFigureOut">
               <a:rPr lang="en-US" smtClean="0"/>
-              <a:t>1/27/13</a:t>
+              <a:t>4/29/2026</a:t>
             </a:fld>
             <a:endParaRPr lang="en-US"/>
           </a:p>
@@ -2091,10 +2091,9 @@
           </a:lstStyle>
           <a:p>
             <a:r>
-              <a:rPr lang="en-US" smtClean="0"/>
+              <a:rPr lang="en-US"/>
               <a:t>Click to edit Master title style</a:t>
             </a:r>
-            <a:endParaRPr lang="en-US"/>
           </a:p>
         </p:txBody>
       </p:sp>
@@ -2148,38 +2147,37 @@
           <a:p>
             <a:pPr lvl="0"/>
             <a:r>
-              <a:rPr lang="en-US" smtClean="0"/>
+              <a:rPr lang="en-US"/>
               <a:t>Click to edit Master text styles</a:t>
             </a:r>
           </a:p>
           <a:p>
             <a:pPr lvl="1"/>
             <a:r>
-              <a:rPr lang="en-US" smtClean="0"/>
+              <a:rPr lang="en-US"/>
               <a:t>Second level</a:t>
             </a:r>
           </a:p>
           <a:p>
             <a:pPr lvl="2"/>
             <a:r>
-              <a:rPr lang="en-US" smtClean="0"/>
+              <a:rPr lang="en-US"/>
               <a:t>Third level</a:t>
             </a:r>
           </a:p>
           <a:p>
             <a:pPr lvl="3"/>
             <a:r>
-              <a:rPr lang="en-US" smtClean="0"/>
+              <a:rPr lang="en-US"/>
               <a:t>Fourth level</a:t>
             </a:r>
           </a:p>
           <a:p>
             <a:pPr lvl="4"/>
             <a:r>
-              <a:rPr lang="en-US" smtClean="0"/>
+              <a:rPr lang="en-US"/>
               <a:t>Fifth level</a:t>
             </a:r>
-            <a:endParaRPr lang="en-US"/>
           </a:p>
         </p:txBody>
       </p:sp>
@@ -2242,7 +2240,7 @@
           <a:p>
             <a:pPr lvl="0"/>
             <a:r>
-              <a:rPr lang="en-US" smtClean="0"/>
+              <a:rPr lang="en-US"/>
               <a:t>Click to edit Master text styles</a:t>
             </a:r>
           </a:p>
@@ -2265,7 +2263,7 @@
           <a:p>
             <a:fld id="{5BCAD085-E8A6-8845-BD4E-CB4CCA059FC4}" type="datetimeFigureOut">
               <a:rPr lang="en-US" smtClean="0"/>
-              <a:t>1/27/13</a:t>
+              <a:t>4/29/2026</a:t>
             </a:fld>
             <a:endParaRPr lang="en-US"/>
           </a:p>
@@ -2368,10 +2366,9 @@
           </a:lstStyle>
           <a:p>
             <a:r>
-              <a:rPr lang="en-US" smtClean="0"/>
+              <a:rPr lang="en-US"/>
               <a:t>Click to edit Master title style</a:t>
             </a:r>
-            <a:endParaRPr lang="en-US"/>
           </a:p>
         </p:txBody>
       </p:sp>
@@ -2495,7 +2492,7 @@
           <a:p>
             <a:pPr lvl="0"/>
             <a:r>
-              <a:rPr lang="en-US" smtClean="0"/>
+              <a:rPr lang="en-US"/>
               <a:t>Click to edit Master text styles</a:t>
             </a:r>
           </a:p>
@@ -2518,7 +2515,7 @@
           <a:p>
             <a:fld id="{5BCAD085-E8A6-8845-BD4E-CB4CCA059FC4}" type="datetimeFigureOut">
               <a:rPr lang="en-US" smtClean="0"/>
-              <a:t>1/27/13</a:t>
+              <a:t>4/29/2026</a:t>
             </a:fld>
             <a:endParaRPr lang="en-US"/>
           </a:p>
@@ -2627,10 +2624,9 @@
           <a:lstStyle/>
           <a:p>
             <a:r>
-              <a:rPr lang="en-US" smtClean="0"/>
+              <a:rPr lang="en-US"/>
               <a:t>Click to edit Master title style</a:t>
             </a:r>
-            <a:endParaRPr lang="en-US"/>
           </a:p>
         </p:txBody>
       </p:sp>
@@ -2661,38 +2657,37 @@
           <a:p>
             <a:pPr lvl="0"/>
             <a:r>
-              <a:rPr lang="en-US" smtClean="0"/>
+              <a:rPr lang="en-US"/>
               <a:t>Click to edit Master text styles</a:t>
             </a:r>
           </a:p>
           <a:p>
             <a:pPr lvl="1"/>
             <a:r>
-              <a:rPr lang="en-US" smtClean="0"/>
+              <a:rPr lang="en-US"/>
               <a:t>Second level</a:t>
             </a:r>
           </a:p>
           <a:p>
             <a:pPr lvl="2"/>
             <a:r>
-              <a:rPr lang="en-US" smtClean="0"/>
+              <a:rPr lang="en-US"/>
               <a:t>Third level</a:t>
             </a:r>
           </a:p>
           <a:p>
             <a:pPr lvl="3"/>
             <a:r>
-              <a:rPr lang="en-US" smtClean="0"/>
+              <a:rPr lang="en-US"/>
               <a:t>Fourth level</a:t>
             </a:r>
           </a:p>
           <a:p>
             <a:pPr lvl="4"/>
             <a:r>
-              <a:rPr lang="en-US" smtClean="0"/>
+              <a:rPr lang="en-US"/>
               <a:t>Fifth level</a:t>
             </a:r>
-            <a:endParaRPr lang="en-US"/>
           </a:p>
         </p:txBody>
       </p:sp>
@@ -2731,7 +2726,7 @@
           <a:p>
             <a:fld id="{5BCAD085-E8A6-8845-BD4E-CB4CCA059FC4}" type="datetimeFigureOut">
               <a:rPr lang="en-US" smtClean="0"/>
-              <a:t>1/27/13</a:t>
+              <a:t>4/29/2026</a:t>
             </a:fld>
             <a:endParaRPr lang="en-US"/>
           </a:p>
@@ -3090,7 +3085,7 @@
 </file>
 
 <file path=ppt/slides/slide1.xml><?xml version="1.0" encoding="utf-8"?>
-<p:sld xmlns:a="http://schemas.openxmlformats.org/drawingml/2006/main" xmlns:p="http://schemas.openxmlformats.org/presentationml/2006/main" xmlns:r="http://schemas.openxmlformats.org/officeDocument/2006/relationships">
+<p:sld xmlns:a="http://schemas.openxmlformats.org/drawingml/2006/main" xmlns:r="http://schemas.openxmlformats.org/officeDocument/2006/relationships" xmlns:p="http://schemas.openxmlformats.org/presentationml/2006/main">
   <p:cSld>
     <p:bg>
       <p:bgPr>
@@ -3106,7 +3101,14 @@
         <p:cNvGrpSpPr/>
         <p:nvPr/>
       </p:nvGrpSpPr>
-      <p:grpSpPr/>
+      <p:grpSpPr>
+        <a:xfrm>
+          <a:off x="0" y="0"/>
+          <a:ext cx="0" cy="0"/>
+          <a:chOff x="0" y="0"/>
+          <a:chExt cx="0" cy="0"/>
+        </a:xfrm>
+      </p:grpSpPr>
       <p:sp>
         <p:nvSpPr>
           <p:cNvPr id="2" name="Rectangle 1"/>
@@ -3147,6 +3149,7 @@
           <a:lstStyle/>
           <a:p>
             <a:pPr algn="ctr"/>
+            <a:endParaRPr/>
           </a:p>
         </p:txBody>
       </p:sp>
@@ -3190,6 +3193,7 @@
           <a:lstStyle/>
           <a:p>
             <a:pPr algn="ctr"/>
+            <a:endParaRPr/>
           </a:p>
         </p:txBody>
       </p:sp>
@@ -3233,6 +3237,7 @@
           <a:lstStyle/>
           <a:p>
             <a:pPr algn="ctr"/>
+            <a:endParaRPr/>
           </a:p>
         </p:txBody>
       </p:sp>
@@ -3276,6 +3281,7 @@
           <a:lstStyle/>
           <a:p>
             <a:pPr algn="ctr"/>
+            <a:endParaRPr/>
           </a:p>
         </p:txBody>
       </p:sp>
@@ -3287,7 +3293,7 @@
         </p:nvSpPr>
         <p:spPr>
           <a:xfrm>
-            <a:off x="8686800" y="-1371600"/>
+            <a:off x="7040880" y="740664"/>
             <a:ext cx="4572000" cy="4572000"/>
           </a:xfrm>
           <a:prstGeom prst="roundRect">
@@ -3321,6 +3327,7 @@
           <a:lstStyle/>
           <a:p>
             <a:pPr algn="ctr"/>
+            <a:endParaRPr/>
           </a:p>
         </p:txBody>
       </p:sp>
@@ -3332,7 +3339,7 @@
         </p:nvSpPr>
         <p:spPr>
           <a:xfrm>
-            <a:off x="9326880" y="-731520"/>
+            <a:off x="7630668" y="1301730"/>
             <a:ext cx="3291840" cy="3291840"/>
           </a:xfrm>
           <a:prstGeom prst="roundRect">
@@ -3366,6 +3373,7 @@
           <a:lstStyle/>
           <a:p>
             <a:pPr algn="ctr"/>
+            <a:endParaRPr/>
           </a:p>
         </p:txBody>
       </p:sp>
@@ -3445,6 +3453,7 @@
           <a:lstStyle/>
           <a:p>
             <a:pPr algn="ctr"/>
+            <a:endParaRPr/>
           </a:p>
         </p:txBody>
       </p:sp>
@@ -3558,6 +3567,7 @@
           <a:lstStyle/>
           <a:p>
             <a:pPr algn="ctr"/>
+            <a:endParaRPr/>
           </a:p>
         </p:txBody>
       </p:sp>
@@ -3639,6 +3649,7 @@
           <a:lstStyle/>
           <a:p>
             <a:pPr algn="ctr"/>
+            <a:endParaRPr/>
           </a:p>
         </p:txBody>
       </p:sp>
@@ -4139,6 +4150,7 @@
           <a:lstStyle/>
           <a:p>
             <a:pPr algn="ctr"/>
+            <a:endParaRPr/>
           </a:p>
         </p:txBody>
       </p:sp>
@@ -4219,6 +4231,7 @@
           <a:lstStyle/>
           <a:p>
             <a:pPr algn="ctr"/>
+            <a:endParaRPr/>
           </a:p>
         </p:txBody>
       </p:sp>
@@ -4299,6 +4312,7 @@
           <a:lstStyle/>
           <a:p>
             <a:pPr algn="ctr"/>
+            <a:endParaRPr/>
           </a:p>
         </p:txBody>
       </p:sp>
@@ -4379,6 +4393,7 @@
           <a:lstStyle/>
           <a:p>
             <a:pPr algn="ctr"/>
+            <a:endParaRPr/>
           </a:p>
         </p:txBody>
       </p:sp>
@@ -4459,6 +4474,7 @@
           <a:lstStyle/>
           <a:p>
             <a:pPr algn="ctr"/>
+            <a:endParaRPr/>
           </a:p>
         </p:txBody>
       </p:sp>
@@ -4539,6 +4555,7 @@
           <a:lstStyle/>
           <a:p>
             <a:pPr algn="ctr"/>
+            <a:endParaRPr/>
           </a:p>
         </p:txBody>
       </p:sp>
@@ -4619,6 +4636,7 @@
           <a:lstStyle/>
           <a:p>
             <a:pPr algn="ctr"/>
+            <a:endParaRPr/>
           </a:p>
         </p:txBody>
       </p:sp>
@@ -4699,6 +4717,7 @@
           <a:lstStyle/>
           <a:p>
             <a:pPr algn="ctr"/>
+            <a:endParaRPr/>
           </a:p>
         </p:txBody>
       </p:sp>
@@ -4779,6 +4798,7 @@
           <a:lstStyle/>
           <a:p>
             <a:pPr algn="ctr"/>
+            <a:endParaRPr/>
           </a:p>
         </p:txBody>
       </p:sp>
@@ -4859,6 +4879,7 @@
           <a:lstStyle/>
           <a:p>
             <a:pPr algn="ctr"/>
+            <a:endParaRPr/>
           </a:p>
         </p:txBody>
       </p:sp>
@@ -4939,6 +4960,7 @@
           <a:lstStyle/>
           <a:p>
             <a:pPr algn="ctr"/>
+            <a:endParaRPr/>
           </a:p>
         </p:txBody>
       </p:sp>
@@ -5019,6 +5041,7 @@
           <a:lstStyle/>
           <a:p>
             <a:pPr algn="ctr"/>
+            <a:endParaRPr/>
           </a:p>
         </p:txBody>
       </p:sp>
@@ -5101,7 +5124,7 @@
 </file>
 
 <file path=ppt/slides/slide10.xml><?xml version="1.0" encoding="utf-8"?>
-<p:sld xmlns:a="http://schemas.openxmlformats.org/drawingml/2006/main" xmlns:p="http://schemas.openxmlformats.org/presentationml/2006/main" xmlns:r="http://schemas.openxmlformats.org/officeDocument/2006/relationships">
+<p:sld xmlns:a="http://schemas.openxmlformats.org/drawingml/2006/main" xmlns:r="http://schemas.openxmlformats.org/officeDocument/2006/relationships" xmlns:p="http://schemas.openxmlformats.org/presentationml/2006/main">
   <p:cSld>
     <p:bg>
       <p:bgPr>
@@ -5117,7 +5140,14 @@
         <p:cNvGrpSpPr/>
         <p:nvPr/>
       </p:nvGrpSpPr>
-      <p:grpSpPr/>
+      <p:grpSpPr>
+        <a:xfrm>
+          <a:off x="0" y="0"/>
+          <a:ext cx="0" cy="0"/>
+          <a:chOff x="0" y="0"/>
+          <a:chExt cx="0" cy="0"/>
+        </a:xfrm>
+      </p:grpSpPr>
       <p:sp>
         <p:nvSpPr>
           <p:cNvPr id="2" name="Rectangle 1"/>
@@ -5158,6 +5188,7 @@
           <a:lstStyle/>
           <a:p>
             <a:pPr algn="ctr"/>
+            <a:endParaRPr/>
           </a:p>
         </p:txBody>
       </p:sp>
@@ -5236,6 +5267,7 @@
           <a:lstStyle/>
           <a:p>
             <a:pPr algn="ctr"/>
+            <a:endParaRPr/>
           </a:p>
         </p:txBody>
       </p:sp>
@@ -5279,6 +5311,7 @@
           <a:lstStyle/>
           <a:p>
             <a:pPr algn="ctr"/>
+            <a:endParaRPr/>
           </a:p>
         </p:txBody>
       </p:sp>
@@ -5357,6 +5390,7 @@
           <a:lstStyle/>
           <a:p>
             <a:pPr algn="ctr"/>
+            <a:endParaRPr/>
           </a:p>
         </p:txBody>
       </p:sp>
@@ -5507,6 +5541,7 @@
           <a:lstStyle/>
           <a:p>
             <a:pPr algn="ctr"/>
+            <a:endParaRPr/>
           </a:p>
         </p:txBody>
       </p:sp>
@@ -5550,6 +5585,7 @@
           <a:lstStyle/>
           <a:p>
             <a:pPr algn="ctr"/>
+            <a:endParaRPr/>
           </a:p>
         </p:txBody>
       </p:sp>
@@ -5701,6 +5737,7 @@
           <a:lstStyle/>
           <a:p>
             <a:pPr algn="ctr"/>
+            <a:endParaRPr/>
           </a:p>
         </p:txBody>
       </p:sp>
@@ -5744,6 +5781,7 @@
           <a:lstStyle/>
           <a:p>
             <a:pPr algn="ctr"/>
+            <a:endParaRPr/>
           </a:p>
         </p:txBody>
       </p:sp>
@@ -5895,6 +5933,7 @@
           <a:lstStyle/>
           <a:p>
             <a:pPr algn="ctr"/>
+            <a:endParaRPr/>
           </a:p>
         </p:txBody>
       </p:sp>
@@ -5938,6 +5977,7 @@
           <a:lstStyle/>
           <a:p>
             <a:pPr algn="ctr"/>
+            <a:endParaRPr/>
           </a:p>
         </p:txBody>
       </p:sp>
@@ -6089,6 +6129,7 @@
           <a:lstStyle/>
           <a:p>
             <a:pPr algn="ctr"/>
+            <a:endParaRPr/>
           </a:p>
         </p:txBody>
       </p:sp>
@@ -6132,6 +6173,7 @@
           <a:lstStyle/>
           <a:p>
             <a:pPr algn="ctr"/>
+            <a:endParaRPr/>
           </a:p>
         </p:txBody>
       </p:sp>
@@ -6283,6 +6325,7 @@
           <a:lstStyle/>
           <a:p>
             <a:pPr algn="ctr"/>
+            <a:endParaRPr/>
           </a:p>
         </p:txBody>
       </p:sp>
@@ -6326,6 +6369,7 @@
           <a:lstStyle/>
           <a:p>
             <a:pPr algn="ctr"/>
+            <a:endParaRPr/>
           </a:p>
         </p:txBody>
       </p:sp>
@@ -6477,6 +6521,7 @@
           <a:lstStyle/>
           <a:p>
             <a:pPr algn="ctr"/>
+            <a:endParaRPr/>
           </a:p>
         </p:txBody>
       </p:sp>
@@ -6520,6 +6565,7 @@
           <a:lstStyle/>
           <a:p>
             <a:pPr algn="ctr"/>
+            <a:endParaRPr/>
           </a:p>
         </p:txBody>
       </p:sp>
@@ -6671,6 +6717,7 @@
           <a:lstStyle/>
           <a:p>
             <a:pPr algn="ctr"/>
+            <a:endParaRPr/>
           </a:p>
         </p:txBody>
       </p:sp>
@@ -6714,6 +6761,7 @@
           <a:lstStyle/>
           <a:p>
             <a:pPr algn="ctr"/>
+            <a:endParaRPr/>
           </a:p>
         </p:txBody>
       </p:sp>
@@ -6865,6 +6913,7 @@
           <a:lstStyle/>
           <a:p>
             <a:pPr algn="ctr"/>
+            <a:endParaRPr/>
           </a:p>
         </p:txBody>
       </p:sp>
@@ -6908,6 +6957,7 @@
           <a:lstStyle/>
           <a:p>
             <a:pPr algn="ctr"/>
+            <a:endParaRPr/>
           </a:p>
         </p:txBody>
       </p:sp>
@@ -7059,6 +7109,7 @@
           <a:lstStyle/>
           <a:p>
             <a:pPr algn="ctr"/>
+            <a:endParaRPr/>
           </a:p>
         </p:txBody>
       </p:sp>
@@ -7102,6 +7153,7 @@
           <a:lstStyle/>
           <a:p>
             <a:pPr algn="ctr"/>
+            <a:endParaRPr/>
           </a:p>
         </p:txBody>
       </p:sp>
@@ -7182,6 +7234,7 @@
           <a:lstStyle/>
           <a:p>
             <a:pPr algn="ctr"/>
+            <a:endParaRPr/>
           </a:p>
         </p:txBody>
       </p:sp>
@@ -7299,6 +7352,7 @@
           <a:lstStyle/>
           <a:p>
             <a:pPr algn="ctr"/>
+            <a:endParaRPr/>
           </a:p>
         </p:txBody>
       </p:sp>
@@ -7416,6 +7470,7 @@
           <a:lstStyle/>
           <a:p>
             <a:pPr algn="ctr"/>
+            <a:endParaRPr/>
           </a:p>
         </p:txBody>
       </p:sp>
@@ -7533,6 +7588,7 @@
           <a:lstStyle/>
           <a:p>
             <a:pPr algn="ctr"/>
+            <a:endParaRPr/>
           </a:p>
         </p:txBody>
       </p:sp>
@@ -7650,6 +7706,7 @@
           <a:lstStyle/>
           <a:p>
             <a:pPr algn="ctr"/>
+            <a:endParaRPr/>
           </a:p>
         </p:txBody>
       </p:sp>
@@ -7734,7 +7791,7 @@
 </file>
 
 <file path=ppt/slides/slide11.xml><?xml version="1.0" encoding="utf-8"?>
-<p:sld xmlns:a="http://schemas.openxmlformats.org/drawingml/2006/main" xmlns:p="http://schemas.openxmlformats.org/presentationml/2006/main" xmlns:r="http://schemas.openxmlformats.org/officeDocument/2006/relationships">
+<p:sld xmlns:a="http://schemas.openxmlformats.org/drawingml/2006/main" xmlns:r="http://schemas.openxmlformats.org/officeDocument/2006/relationships" xmlns:p="http://schemas.openxmlformats.org/presentationml/2006/main">
   <p:cSld>
     <p:bg>
       <p:bgPr>
@@ -7750,7 +7807,14 @@
         <p:cNvGrpSpPr/>
         <p:nvPr/>
       </p:nvGrpSpPr>
-      <p:grpSpPr/>
+      <p:grpSpPr>
+        <a:xfrm>
+          <a:off x="0" y="0"/>
+          <a:ext cx="0" cy="0"/>
+          <a:chOff x="0" y="0"/>
+          <a:chExt cx="0" cy="0"/>
+        </a:xfrm>
+      </p:grpSpPr>
       <p:sp>
         <p:nvSpPr>
           <p:cNvPr id="2" name="Rectangle 1"/>
@@ -7791,6 +7855,7 @@
           <a:lstStyle/>
           <a:p>
             <a:pPr algn="ctr"/>
+            <a:endParaRPr/>
           </a:p>
         </p:txBody>
       </p:sp>
@@ -7869,6 +7934,7 @@
           <a:lstStyle/>
           <a:p>
             <a:pPr algn="ctr"/>
+            <a:endParaRPr/>
           </a:p>
         </p:txBody>
       </p:sp>
@@ -7912,6 +7978,7 @@
           <a:lstStyle/>
           <a:p>
             <a:pPr algn="ctr"/>
+            <a:endParaRPr/>
           </a:p>
         </p:txBody>
       </p:sp>
@@ -7990,6 +8057,7 @@
           <a:lstStyle/>
           <a:p>
             <a:pPr algn="ctr"/>
+            <a:endParaRPr/>
           </a:p>
         </p:txBody>
       </p:sp>
@@ -8140,6 +8208,7 @@
           <a:lstStyle/>
           <a:p>
             <a:pPr algn="ctr"/>
+            <a:endParaRPr/>
           </a:p>
         </p:txBody>
       </p:sp>
@@ -8183,6 +8252,7 @@
           <a:lstStyle/>
           <a:p>
             <a:pPr algn="ctr"/>
+            <a:endParaRPr/>
           </a:p>
         </p:txBody>
       </p:sp>
@@ -8331,6 +8401,7 @@
           <a:lstStyle/>
           <a:p>
             <a:pPr algn="ctr"/>
+            <a:endParaRPr/>
           </a:p>
         </p:txBody>
       </p:sp>
@@ -8479,6 +8550,7 @@
           <a:lstStyle/>
           <a:p>
             <a:pPr algn="ctr"/>
+            <a:endParaRPr/>
           </a:p>
         </p:txBody>
       </p:sp>
@@ -8627,6 +8699,7 @@
           <a:lstStyle/>
           <a:p>
             <a:pPr algn="ctr"/>
+            <a:endParaRPr/>
           </a:p>
         </p:txBody>
       </p:sp>
@@ -8775,6 +8848,7 @@
           <a:lstStyle/>
           <a:p>
             <a:pPr algn="ctr"/>
+            <a:endParaRPr/>
           </a:p>
         </p:txBody>
       </p:sp>
@@ -8923,6 +8997,7 @@
           <a:lstStyle/>
           <a:p>
             <a:pPr algn="ctr"/>
+            <a:endParaRPr/>
           </a:p>
         </p:txBody>
       </p:sp>
@@ -9071,6 +9146,7 @@
           <a:lstStyle/>
           <a:p>
             <a:pPr algn="ctr"/>
+            <a:endParaRPr/>
           </a:p>
         </p:txBody>
       </p:sp>
@@ -9219,6 +9295,7 @@
           <a:lstStyle/>
           <a:p>
             <a:pPr algn="ctr"/>
+            <a:endParaRPr/>
           </a:p>
         </p:txBody>
       </p:sp>
@@ -9367,6 +9444,7 @@
           <a:lstStyle/>
           <a:p>
             <a:pPr algn="ctr"/>
+            <a:endParaRPr/>
           </a:p>
         </p:txBody>
       </p:sp>
@@ -9515,6 +9593,7 @@
           <a:lstStyle/>
           <a:p>
             <a:pPr algn="ctr"/>
+            <a:endParaRPr/>
           </a:p>
         </p:txBody>
       </p:sp>
@@ -9663,6 +9742,7 @@
           <a:lstStyle/>
           <a:p>
             <a:pPr algn="ctr"/>
+            <a:endParaRPr/>
           </a:p>
         </p:txBody>
       </p:sp>
@@ -9811,6 +9891,7 @@
           <a:lstStyle/>
           <a:p>
             <a:pPr algn="ctr"/>
+            <a:endParaRPr/>
           </a:p>
         </p:txBody>
       </p:sp>
@@ -9959,6 +10040,7 @@
           <a:lstStyle/>
           <a:p>
             <a:pPr algn="ctr"/>
+            <a:endParaRPr/>
           </a:p>
         </p:txBody>
       </p:sp>
@@ -10107,6 +10189,7 @@
           <a:lstStyle/>
           <a:p>
             <a:pPr algn="ctr"/>
+            <a:endParaRPr/>
           </a:p>
         </p:txBody>
       </p:sp>
@@ -10255,6 +10338,7 @@
           <a:lstStyle/>
           <a:p>
             <a:pPr algn="ctr"/>
+            <a:endParaRPr/>
           </a:p>
         </p:txBody>
       </p:sp>
@@ -10403,6 +10487,7 @@
           <a:lstStyle/>
           <a:p>
             <a:pPr algn="ctr"/>
+            <a:endParaRPr/>
           </a:p>
         </p:txBody>
       </p:sp>
@@ -10551,6 +10636,7 @@
           <a:lstStyle/>
           <a:p>
             <a:pPr algn="ctr"/>
+            <a:endParaRPr/>
           </a:p>
         </p:txBody>
       </p:sp>
@@ -10699,6 +10785,7 @@
           <a:lstStyle/>
           <a:p>
             <a:pPr algn="ctr"/>
+            <a:endParaRPr/>
           </a:p>
         </p:txBody>
       </p:sp>
@@ -10816,7 +10903,7 @@
 </file>
 
 <file path=ppt/slides/slide12.xml><?xml version="1.0" encoding="utf-8"?>
-<p:sld xmlns:a="http://schemas.openxmlformats.org/drawingml/2006/main" xmlns:p="http://schemas.openxmlformats.org/presentationml/2006/main" xmlns:r="http://schemas.openxmlformats.org/officeDocument/2006/relationships">
+<p:sld xmlns:a="http://schemas.openxmlformats.org/drawingml/2006/main" xmlns:r="http://schemas.openxmlformats.org/officeDocument/2006/relationships" xmlns:p="http://schemas.openxmlformats.org/presentationml/2006/main">
   <p:cSld>
     <p:bg>
       <p:bgPr>
@@ -10832,7 +10919,14 @@
         <p:cNvGrpSpPr/>
         <p:nvPr/>
       </p:nvGrpSpPr>
-      <p:grpSpPr/>
+      <p:grpSpPr>
+        <a:xfrm>
+          <a:off x="0" y="0"/>
+          <a:ext cx="0" cy="0"/>
+          <a:chOff x="0" y="0"/>
+          <a:chExt cx="0" cy="0"/>
+        </a:xfrm>
+      </p:grpSpPr>
       <p:sp>
         <p:nvSpPr>
           <p:cNvPr id="2" name="Rectangle 1"/>
@@ -10873,6 +10967,7 @@
           <a:lstStyle/>
           <a:p>
             <a:pPr algn="ctr"/>
+            <a:endParaRPr/>
           </a:p>
         </p:txBody>
       </p:sp>
@@ -10916,96 +11011,7 @@
           <a:lstStyle/>
           <a:p>
             <a:pPr algn="ctr"/>
-          </a:p>
-        </p:txBody>
-      </p:sp>
-      <p:sp>
-        <p:nvSpPr>
-          <p:cNvPr id="4" name="Rounded Rectangle 3"/>
-          <p:cNvSpPr/>
-          <p:nvPr/>
-        </p:nvSpPr>
-        <p:spPr>
-          <a:xfrm>
-            <a:off x="-914400" y="4114800"/>
-            <a:ext cx="5486400" cy="5486400"/>
-          </a:xfrm>
-          <a:prstGeom prst="roundRect">
-            <a:avLst>
-              <a:gd name="adj" fmla="val 50000"/>
-            </a:avLst>
-          </a:prstGeom>
-          <a:solidFill>
-            <a:srgbClr val="004080"/>
-          </a:solidFill>
-          <a:ln>
-            <a:noFill/>
-          </a:ln>
-        </p:spPr>
-        <p:style>
-          <a:lnRef idx="1">
-            <a:schemeClr val="accent1"/>
-          </a:lnRef>
-          <a:fillRef idx="3">
-            <a:schemeClr val="accent1"/>
-          </a:fillRef>
-          <a:effectRef idx="2">
-            <a:schemeClr val="accent1"/>
-          </a:effectRef>
-          <a:fontRef idx="minor">
-            <a:schemeClr val="lt1"/>
-          </a:fontRef>
-        </p:style>
-        <p:txBody>
-          <a:bodyPr rtlCol="0" anchor="ctr"/>
-          <a:lstStyle/>
-          <a:p>
-            <a:pPr algn="ctr"/>
-          </a:p>
-        </p:txBody>
-      </p:sp>
-      <p:sp>
-        <p:nvSpPr>
-          <p:cNvPr id="5" name="Rounded Rectangle 4"/>
-          <p:cNvSpPr/>
-          <p:nvPr/>
-        </p:nvSpPr>
-        <p:spPr>
-          <a:xfrm>
-            <a:off x="9144000" y="-914400"/>
-            <a:ext cx="4572000" cy="4572000"/>
-          </a:xfrm>
-          <a:prstGeom prst="roundRect">
-            <a:avLst>
-              <a:gd name="adj" fmla="val 50000"/>
-            </a:avLst>
-          </a:prstGeom>
-          <a:solidFill>
-            <a:srgbClr val="005599"/>
-          </a:solidFill>
-          <a:ln>
-            <a:noFill/>
-          </a:ln>
-        </p:spPr>
-        <p:style>
-          <a:lnRef idx="1">
-            <a:schemeClr val="accent1"/>
-          </a:lnRef>
-          <a:fillRef idx="3">
-            <a:schemeClr val="accent1"/>
-          </a:fillRef>
-          <a:effectRef idx="2">
-            <a:schemeClr val="accent1"/>
-          </a:effectRef>
-          <a:fontRef idx="minor">
-            <a:schemeClr val="lt1"/>
-          </a:fontRef>
-        </p:style>
-        <p:txBody>
-          <a:bodyPr rtlCol="0" anchor="ctr"/>
-          <a:lstStyle/>
-          <a:p>
-            <a:pPr algn="ctr"/>
+            <a:endParaRPr/>
           </a:p>
         </p:txBody>
       </p:sp>
@@ -11084,6 +11090,7 @@
           <a:lstStyle/>
           <a:p>
             <a:pPr algn="ctr"/>
+            <a:endParaRPr/>
           </a:p>
         </p:txBody>
       </p:sp>
@@ -11164,6 +11171,7 @@
           <a:lstStyle/>
           <a:p>
             <a:pPr algn="ctr"/>
+            <a:endParaRPr/>
           </a:p>
         </p:txBody>
       </p:sp>
@@ -11296,7 +11304,7 @@
           <a:p>
             <a:pPr algn="l"/>
             <a:r>
-              <a:rPr sz="1100" b="0" i="0">
+              <a:rPr sz="1100" b="0" i="0" dirty="0">
                 <a:solidFill>
                   <a:srgbClr val="FFFFFF"/>
                 </a:solidFill>
@@ -11366,84 +11374,47 @@
           <a:p>
             <a:pPr algn="l"/>
             <a:r>
-              <a:rPr sz="1100" b="0" i="0">
+              <a:rPr sz="1100" b="0" i="0" dirty="0">
                 <a:solidFill>
                   <a:srgbClr val="FFFFFF"/>
                 </a:solidFill>
                 <a:latin typeface="Calibri"/>
               </a:rPr>
-              <a:t>github.com/prateekraiger/all_blue</a:t>
-            </a:r>
-          </a:p>
-        </p:txBody>
-      </p:sp>
-      <p:sp>
-        <p:nvSpPr>
-          <p:cNvPr id="16" name="TextBox 15"/>
-          <p:cNvSpPr txBox="1"/>
-          <p:nvPr/>
-        </p:nvSpPr>
-        <p:spPr>
-          <a:xfrm>
-            <a:off x="2286000" y="4873752"/>
-            <a:ext cx="1645920" cy="347472"/>
-          </a:xfrm>
-          <a:prstGeom prst="rect">
-            <a:avLst/>
-          </a:prstGeom>
-          <a:noFill/>
-        </p:spPr>
-        <p:txBody>
-          <a:bodyPr wrap="square">
-            <a:spAutoFit/>
-          </a:bodyPr>
-          <a:lstStyle/>
-          <a:p>
-            <a:pPr algn="l"/>
-            <a:r>
-              <a:rPr sz="1100" b="1" i="0">
-                <a:solidFill>
-                  <a:srgbClr val="F0A500"/>
-                </a:solidFill>
-                <a:latin typeface="Calibri"/>
-              </a:rPr>
-              <a:t>Hackathon :</a:t>
-            </a:r>
-          </a:p>
-        </p:txBody>
-      </p:sp>
-      <p:sp>
-        <p:nvSpPr>
-          <p:cNvPr id="17" name="TextBox 16"/>
-          <p:cNvSpPr txBox="1"/>
-          <p:nvPr/>
-        </p:nvSpPr>
-        <p:spPr>
-          <a:xfrm>
-            <a:off x="4023360" y="4873752"/>
-            <a:ext cx="5943600" cy="347472"/>
-          </a:xfrm>
-          <a:prstGeom prst="rect">
-            <a:avLst/>
-          </a:prstGeom>
-          <a:noFill/>
-        </p:spPr>
-        <p:txBody>
-          <a:bodyPr wrap="square">
-            <a:spAutoFit/>
-          </a:bodyPr>
-          <a:lstStyle/>
-          <a:p>
-            <a:pPr algn="l"/>
-            <a:r>
-              <a:rPr sz="1100" b="0" i="0">
+              <a:t>github.com/</a:t>
+            </a:r>
+            <a:r>
+              <a:rPr sz="1100" b="0" i="0" dirty="0" err="1">
                 <a:solidFill>
                   <a:srgbClr val="FFFFFF"/>
                 </a:solidFill>
                 <a:latin typeface="Calibri"/>
               </a:rPr>
-              <a:t>Smart India Hackathon 2025</a:t>
-            </a:r>
+              <a:t>prateekraiger</a:t>
+            </a:r>
+            <a:r>
+              <a:rPr sz="1100" b="0" i="0" dirty="0">
+                <a:solidFill>
+                  <a:srgbClr val="FFFFFF"/>
+                </a:solidFill>
+                <a:latin typeface="Calibri"/>
+              </a:rPr>
+              <a:t>/</a:t>
+            </a:r>
+            <a:r>
+              <a:rPr sz="1100" b="0" i="0" dirty="0" err="1">
+                <a:solidFill>
+                  <a:srgbClr val="FFFFFF"/>
+                </a:solidFill>
+                <a:latin typeface="Calibri"/>
+              </a:rPr>
+              <a:t>all_blue</a:t>
+            </a:r>
+            <a:endParaRPr sz="1100" b="0" i="0" dirty="0">
+              <a:solidFill>
+                <a:srgbClr val="FFFFFF"/>
+              </a:solidFill>
+              <a:latin typeface="Calibri"/>
+            </a:endParaRPr>
           </a:p>
         </p:txBody>
       </p:sp>
@@ -11489,6 +11460,7 @@
           <a:lstStyle/>
           <a:p>
             <a:pPr algn="ctr"/>
+            <a:endParaRPr/>
           </a:p>
         </p:txBody>
       </p:sp>
@@ -11569,6 +11541,7 @@
           <a:lstStyle/>
           <a:p>
             <a:pPr algn="ctr"/>
+            <a:endParaRPr/>
           </a:p>
         </p:txBody>
       </p:sp>
@@ -11649,6 +11622,7 @@
           <a:lstStyle/>
           <a:p>
             <a:pPr algn="ctr"/>
+            <a:endParaRPr/>
           </a:p>
         </p:txBody>
       </p:sp>
@@ -11729,6 +11703,7 @@
           <a:lstStyle/>
           <a:p>
             <a:pPr algn="ctr"/>
+            <a:endParaRPr/>
           </a:p>
         </p:txBody>
       </p:sp>
@@ -11809,6 +11784,7 @@
           <a:lstStyle/>
           <a:p>
             <a:pPr algn="ctr"/>
+            <a:endParaRPr/>
           </a:p>
         </p:txBody>
       </p:sp>
@@ -11889,6 +11865,7 @@
           <a:lstStyle/>
           <a:p>
             <a:pPr algn="ctr"/>
+            <a:endParaRPr/>
           </a:p>
         </p:txBody>
       </p:sp>
@@ -11929,35 +11906,41 @@
       </p:sp>
       <p:sp>
         <p:nvSpPr>
-          <p:cNvPr id="30" name="TextBox 29"/>
-          <p:cNvSpPr txBox="1"/>
-          <p:nvPr/>
-        </p:nvSpPr>
-        <p:spPr>
-          <a:xfrm>
-            <a:off x="0" y="6144768"/>
-            <a:ext cx="12188952" cy="320040"/>
-          </a:xfrm>
-          <a:prstGeom prst="rect">
-            <a:avLst/>
-          </a:prstGeom>
-          <a:noFill/>
-        </p:spPr>
-        <p:txBody>
-          <a:bodyPr wrap="square">
-            <a:spAutoFit/>
-          </a:bodyPr>
-          <a:lstStyle/>
-          <a:p>
-            <a:pPr algn="ctr"/>
-            <a:r>
-              <a:rPr sz="1000" b="0" i="0">
-                <a:solidFill>
-                  <a:srgbClr val="88AACC"/>
-                </a:solidFill>
-                <a:latin typeface="Calibri"/>
-              </a:rPr>
-              <a:t>Built with ❤ for SIH 2025</a:t>
+          <p:cNvPr id="31" name="TextBox 30">
+            <a:extLst>
+              <a:ext uri="{FF2B5EF4-FFF2-40B4-BE49-F238E27FC236}">
+                <a16:creationId xmlns:a16="http://schemas.microsoft.com/office/drawing/2014/main" id="{DE47FA47-702F-5CA5-C954-BBBDAF65E005}"/>
+              </a:ext>
+            </a:extLst>
+          </p:cNvPr>
+          <p:cNvSpPr txBox="1"/>
+          <p:nvPr/>
+        </p:nvSpPr>
+        <p:spPr>
+          <a:xfrm>
+            <a:off x="1403721" y="1188720"/>
+            <a:ext cx="9445752" cy="1371600"/>
+          </a:xfrm>
+          <a:prstGeom prst="rect">
+            <a:avLst/>
+          </a:prstGeom>
+          <a:noFill/>
+        </p:spPr>
+        <p:txBody>
+          <a:bodyPr wrap="square">
+            <a:spAutoFit/>
+          </a:bodyPr>
+          <a:lstStyle/>
+          <a:p>
+            <a:pPr algn="ctr"/>
+            <a:r>
+              <a:rPr sz="6400" b="1" i="0">
+                <a:solidFill>
+                  <a:srgbClr val="FFFFFF"/>
+                </a:solidFill>
+                <a:latin typeface="Calibri"/>
+              </a:rPr>
+              <a:t>THANK YOU</a:t>
             </a:r>
           </a:p>
         </p:txBody>
@@ -11971,7 +11954,7 @@
 </file>
 
 <file path=ppt/slides/slide2.xml><?xml version="1.0" encoding="utf-8"?>
-<p:sld xmlns:a="http://schemas.openxmlformats.org/drawingml/2006/main" xmlns:p="http://schemas.openxmlformats.org/presentationml/2006/main" xmlns:r="http://schemas.openxmlformats.org/officeDocument/2006/relationships">
+<p:sld xmlns:a="http://schemas.openxmlformats.org/drawingml/2006/main" xmlns:r="http://schemas.openxmlformats.org/officeDocument/2006/relationships" xmlns:p="http://schemas.openxmlformats.org/presentationml/2006/main">
   <p:cSld>
     <p:bg>
       <p:bgPr>
@@ -11987,7 +11970,14 @@
         <p:cNvGrpSpPr/>
         <p:nvPr/>
       </p:nvGrpSpPr>
-      <p:grpSpPr/>
+      <p:grpSpPr>
+        <a:xfrm>
+          <a:off x="0" y="0"/>
+          <a:ext cx="0" cy="0"/>
+          <a:chOff x="0" y="0"/>
+          <a:chExt cx="0" cy="0"/>
+        </a:xfrm>
+      </p:grpSpPr>
       <p:sp>
         <p:nvSpPr>
           <p:cNvPr id="2" name="Rectangle 1"/>
@@ -12028,6 +12018,7 @@
           <a:lstStyle/>
           <a:p>
             <a:pPr algn="ctr"/>
+            <a:endParaRPr/>
           </a:p>
         </p:txBody>
       </p:sp>
@@ -12106,6 +12097,7 @@
           <a:lstStyle/>
           <a:p>
             <a:pPr algn="ctr"/>
+            <a:endParaRPr/>
           </a:p>
         </p:txBody>
       </p:sp>
@@ -12149,6 +12141,7 @@
           <a:lstStyle/>
           <a:p>
             <a:pPr algn="ctr"/>
+            <a:endParaRPr/>
           </a:p>
         </p:txBody>
       </p:sp>
@@ -12227,6 +12220,7 @@
           <a:lstStyle/>
           <a:p>
             <a:pPr algn="ctr"/>
+            <a:endParaRPr/>
           </a:p>
         </p:txBody>
       </p:sp>
@@ -12377,6 +12371,7 @@
           <a:lstStyle/>
           <a:p>
             <a:pPr algn="ctr"/>
+            <a:endParaRPr/>
           </a:p>
         </p:txBody>
       </p:sp>
@@ -12420,6 +12415,7 @@
           <a:lstStyle/>
           <a:p>
             <a:pPr algn="ctr"/>
+            <a:endParaRPr/>
           </a:p>
         </p:txBody>
       </p:sp>
@@ -12583,6 +12579,7 @@
           <a:lstStyle/>
           <a:p>
             <a:pPr algn="ctr"/>
+            <a:endParaRPr/>
           </a:p>
         </p:txBody>
       </p:sp>
@@ -12626,6 +12623,7 @@
           <a:lstStyle/>
           <a:p>
             <a:pPr algn="ctr"/>
+            <a:endParaRPr/>
           </a:p>
         </p:txBody>
       </p:sp>
@@ -12789,6 +12787,7 @@
           <a:lstStyle/>
           <a:p>
             <a:pPr algn="ctr"/>
+            <a:endParaRPr/>
           </a:p>
         </p:txBody>
       </p:sp>
@@ -12904,6 +12903,7 @@
           <a:lstStyle/>
           <a:p>
             <a:pPr algn="ctr"/>
+            <a:endParaRPr/>
           </a:p>
         </p:txBody>
       </p:sp>
@@ -13019,6 +13019,7 @@
           <a:lstStyle/>
           <a:p>
             <a:pPr algn="ctr"/>
+            <a:endParaRPr/>
           </a:p>
         </p:txBody>
       </p:sp>
@@ -13134,6 +13135,7 @@
           <a:lstStyle/>
           <a:p>
             <a:pPr algn="ctr"/>
+            <a:endParaRPr/>
           </a:p>
         </p:txBody>
       </p:sp>
@@ -13249,6 +13251,7 @@
           <a:lstStyle/>
           <a:p>
             <a:pPr algn="ctr"/>
+            <a:endParaRPr/>
           </a:p>
         </p:txBody>
       </p:sp>
@@ -13331,7 +13334,7 @@
 </file>
 
 <file path=ppt/slides/slide3.xml><?xml version="1.0" encoding="utf-8"?>
-<p:sld xmlns:a="http://schemas.openxmlformats.org/drawingml/2006/main" xmlns:p="http://schemas.openxmlformats.org/presentationml/2006/main" xmlns:r="http://schemas.openxmlformats.org/officeDocument/2006/relationships">
+<p:sld xmlns:a="http://schemas.openxmlformats.org/drawingml/2006/main" xmlns:r="http://schemas.openxmlformats.org/officeDocument/2006/relationships" xmlns:p="http://schemas.openxmlformats.org/presentationml/2006/main">
   <p:cSld>
     <p:bg>
       <p:bgPr>
@@ -13347,7 +13350,14 @@
         <p:cNvGrpSpPr/>
         <p:nvPr/>
       </p:nvGrpSpPr>
-      <p:grpSpPr/>
+      <p:grpSpPr>
+        <a:xfrm>
+          <a:off x="0" y="0"/>
+          <a:ext cx="0" cy="0"/>
+          <a:chOff x="0" y="0"/>
+          <a:chExt cx="0" cy="0"/>
+        </a:xfrm>
+      </p:grpSpPr>
       <p:sp>
         <p:nvSpPr>
           <p:cNvPr id="2" name="Rectangle 1"/>
@@ -13388,6 +13398,7 @@
           <a:lstStyle/>
           <a:p>
             <a:pPr algn="ctr"/>
+            <a:endParaRPr/>
           </a:p>
         </p:txBody>
       </p:sp>
@@ -13466,6 +13477,7 @@
           <a:lstStyle/>
           <a:p>
             <a:pPr algn="ctr"/>
+            <a:endParaRPr/>
           </a:p>
         </p:txBody>
       </p:sp>
@@ -13509,6 +13521,7 @@
           <a:lstStyle/>
           <a:p>
             <a:pPr algn="ctr"/>
+            <a:endParaRPr/>
           </a:p>
         </p:txBody>
       </p:sp>
@@ -13587,6 +13600,7 @@
           <a:lstStyle/>
           <a:p>
             <a:pPr algn="ctr"/>
+            <a:endParaRPr/>
           </a:p>
         </p:txBody>
       </p:sp>
@@ -13737,6 +13751,7 @@
           <a:lstStyle/>
           <a:p>
             <a:pPr algn="ctr"/>
+            <a:endParaRPr/>
           </a:p>
         </p:txBody>
       </p:sp>
@@ -13817,6 +13832,7 @@
           <a:lstStyle/>
           <a:p>
             <a:pPr algn="ctr"/>
+            <a:endParaRPr/>
           </a:p>
         </p:txBody>
       </p:sp>
@@ -13969,6 +13985,7 @@
           <a:lstStyle/>
           <a:p>
             <a:pPr algn="ctr"/>
+            <a:endParaRPr/>
           </a:p>
         </p:txBody>
       </p:sp>
@@ -14121,6 +14138,7 @@
           <a:lstStyle/>
           <a:p>
             <a:pPr algn="ctr"/>
+            <a:endParaRPr/>
           </a:p>
         </p:txBody>
       </p:sp>
@@ -14273,6 +14291,7 @@
           <a:lstStyle/>
           <a:p>
             <a:pPr algn="ctr"/>
+            <a:endParaRPr/>
           </a:p>
         </p:txBody>
       </p:sp>
@@ -14425,6 +14444,7 @@
           <a:lstStyle/>
           <a:p>
             <a:pPr algn="ctr"/>
+            <a:endParaRPr/>
           </a:p>
         </p:txBody>
       </p:sp>
@@ -14577,6 +14597,7 @@
           <a:lstStyle/>
           <a:p>
             <a:pPr algn="ctr"/>
+            <a:endParaRPr/>
           </a:p>
         </p:txBody>
       </p:sp>
@@ -14696,7 +14717,7 @@
 </file>
 
 <file path=ppt/slides/slide4.xml><?xml version="1.0" encoding="utf-8"?>
-<p:sld xmlns:a="http://schemas.openxmlformats.org/drawingml/2006/main" xmlns:p="http://schemas.openxmlformats.org/presentationml/2006/main" xmlns:r="http://schemas.openxmlformats.org/officeDocument/2006/relationships">
+<p:sld xmlns:a="http://schemas.openxmlformats.org/drawingml/2006/main" xmlns:r="http://schemas.openxmlformats.org/officeDocument/2006/relationships" xmlns:p="http://schemas.openxmlformats.org/presentationml/2006/main">
   <p:cSld>
     <p:bg>
       <p:bgPr>
@@ -14712,7 +14733,14 @@
         <p:cNvGrpSpPr/>
         <p:nvPr/>
       </p:nvGrpSpPr>
-      <p:grpSpPr/>
+      <p:grpSpPr>
+        <a:xfrm>
+          <a:off x="0" y="0"/>
+          <a:ext cx="0" cy="0"/>
+          <a:chOff x="0" y="0"/>
+          <a:chExt cx="0" cy="0"/>
+        </a:xfrm>
+      </p:grpSpPr>
       <p:sp>
         <p:nvSpPr>
           <p:cNvPr id="2" name="Rectangle 1"/>
@@ -14753,6 +14781,7 @@
           <a:lstStyle/>
           <a:p>
             <a:pPr algn="ctr"/>
+            <a:endParaRPr/>
           </a:p>
         </p:txBody>
       </p:sp>
@@ -14831,6 +14860,7 @@
           <a:lstStyle/>
           <a:p>
             <a:pPr algn="ctr"/>
+            <a:endParaRPr/>
           </a:p>
         </p:txBody>
       </p:sp>
@@ -14874,6 +14904,7 @@
           <a:lstStyle/>
           <a:p>
             <a:pPr algn="ctr"/>
+            <a:endParaRPr/>
           </a:p>
         </p:txBody>
       </p:sp>
@@ -14952,6 +14983,7 @@
           <a:lstStyle/>
           <a:p>
             <a:pPr algn="ctr"/>
+            <a:endParaRPr/>
           </a:p>
         </p:txBody>
       </p:sp>
@@ -15102,6 +15134,7 @@
           <a:lstStyle/>
           <a:p>
             <a:pPr algn="ctr"/>
+            <a:endParaRPr/>
           </a:p>
         </p:txBody>
       </p:sp>
@@ -15182,6 +15215,7 @@
           <a:lstStyle/>
           <a:p>
             <a:pPr algn="ctr"/>
+            <a:endParaRPr/>
           </a:p>
         </p:txBody>
       </p:sp>
@@ -15298,6 +15332,7 @@
           <a:lstStyle/>
           <a:p>
             <a:pPr algn="ctr"/>
+            <a:endParaRPr/>
           </a:p>
         </p:txBody>
       </p:sp>
@@ -15415,6 +15450,7 @@
           <a:lstStyle/>
           <a:p>
             <a:pPr algn="ctr"/>
+            <a:endParaRPr/>
           </a:p>
         </p:txBody>
       </p:sp>
@@ -15532,6 +15568,7 @@
           <a:lstStyle/>
           <a:p>
             <a:pPr algn="ctr"/>
+            <a:endParaRPr/>
           </a:p>
         </p:txBody>
       </p:sp>
@@ -15649,6 +15686,7 @@
           <a:lstStyle/>
           <a:p>
             <a:pPr algn="ctr"/>
+            <a:endParaRPr/>
           </a:p>
         </p:txBody>
       </p:sp>
@@ -15766,6 +15804,7 @@
           <a:lstStyle/>
           <a:p>
             <a:pPr algn="ctr"/>
+            <a:endParaRPr/>
           </a:p>
         </p:txBody>
       </p:sp>
@@ -15848,6 +15887,7 @@
           <a:lstStyle/>
           <a:p>
             <a:pPr algn="ctr"/>
+            <a:endParaRPr/>
           </a:p>
         </p:txBody>
       </p:sp>
@@ -15928,6 +15968,7 @@
           <a:lstStyle/>
           <a:p>
             <a:pPr algn="ctr"/>
+            <a:endParaRPr/>
           </a:p>
         </p:txBody>
       </p:sp>
@@ -16008,6 +16049,7 @@
           <a:lstStyle/>
           <a:p>
             <a:pPr algn="ctr"/>
+            <a:endParaRPr/>
           </a:p>
         </p:txBody>
       </p:sp>
@@ -16088,6 +16130,7 @@
           <a:lstStyle/>
           <a:p>
             <a:pPr algn="ctr"/>
+            <a:endParaRPr/>
           </a:p>
         </p:txBody>
       </p:sp>
@@ -16168,6 +16211,7 @@
           <a:lstStyle/>
           <a:p>
             <a:pPr algn="ctr"/>
+            <a:endParaRPr/>
           </a:p>
         </p:txBody>
       </p:sp>
@@ -16248,6 +16292,7 @@
           <a:lstStyle/>
           <a:p>
             <a:pPr algn="ctr"/>
+            <a:endParaRPr/>
           </a:p>
         </p:txBody>
       </p:sp>
@@ -16328,6 +16373,7 @@
           <a:lstStyle/>
           <a:p>
             <a:pPr algn="ctr"/>
+            <a:endParaRPr/>
           </a:p>
         </p:txBody>
       </p:sp>
@@ -16371,6 +16417,7 @@
           <a:lstStyle/>
           <a:p>
             <a:pPr algn="ctr"/>
+            <a:endParaRPr/>
           </a:p>
         </p:txBody>
       </p:sp>
@@ -16451,6 +16498,7 @@
           <a:lstStyle/>
           <a:p>
             <a:pPr algn="ctr"/>
+            <a:endParaRPr/>
           </a:p>
         </p:txBody>
       </p:sp>
@@ -16494,6 +16542,7 @@
           <a:lstStyle/>
           <a:p>
             <a:pPr algn="ctr"/>
+            <a:endParaRPr/>
           </a:p>
         </p:txBody>
       </p:sp>
@@ -16575,6 +16624,7 @@
           <a:lstStyle/>
           <a:p>
             <a:pPr algn="ctr"/>
+            <a:endParaRPr/>
           </a:p>
         </p:txBody>
       </p:sp>
@@ -16618,6 +16668,7 @@
           <a:lstStyle/>
           <a:p>
             <a:pPr algn="ctr"/>
+            <a:endParaRPr/>
           </a:p>
         </p:txBody>
       </p:sp>
@@ -16699,6 +16750,7 @@
           <a:lstStyle/>
           <a:p>
             <a:pPr algn="ctr"/>
+            <a:endParaRPr/>
           </a:p>
         </p:txBody>
       </p:sp>
@@ -16742,6 +16794,7 @@
           <a:lstStyle/>
           <a:p>
             <a:pPr algn="ctr"/>
+            <a:endParaRPr/>
           </a:p>
         </p:txBody>
       </p:sp>
@@ -16823,6 +16876,7 @@
           <a:lstStyle/>
           <a:p>
             <a:pPr algn="ctr"/>
+            <a:endParaRPr/>
           </a:p>
         </p:txBody>
       </p:sp>
@@ -16866,6 +16920,7 @@
           <a:lstStyle/>
           <a:p>
             <a:pPr algn="ctr"/>
+            <a:endParaRPr/>
           </a:p>
         </p:txBody>
       </p:sp>
@@ -16947,6 +17002,7 @@
           <a:lstStyle/>
           <a:p>
             <a:pPr algn="ctr"/>
+            <a:endParaRPr/>
           </a:p>
         </p:txBody>
       </p:sp>
@@ -16990,6 +17046,7 @@
           <a:lstStyle/>
           <a:p>
             <a:pPr algn="ctr"/>
+            <a:endParaRPr/>
           </a:p>
         </p:txBody>
       </p:sp>
@@ -17071,6 +17128,7 @@
           <a:lstStyle/>
           <a:p>
             <a:pPr algn="ctr"/>
+            <a:endParaRPr/>
           </a:p>
         </p:txBody>
       </p:sp>
@@ -17118,7 +17176,7 @@
 </file>
 
 <file path=ppt/slides/slide5.xml><?xml version="1.0" encoding="utf-8"?>
-<p:sld xmlns:a="http://schemas.openxmlformats.org/drawingml/2006/main" xmlns:p="http://schemas.openxmlformats.org/presentationml/2006/main" xmlns:r="http://schemas.openxmlformats.org/officeDocument/2006/relationships">
+<p:sld xmlns:a="http://schemas.openxmlformats.org/drawingml/2006/main" xmlns:r="http://schemas.openxmlformats.org/officeDocument/2006/relationships" xmlns:p="http://schemas.openxmlformats.org/presentationml/2006/main">
   <p:cSld>
     <p:bg>
       <p:bgPr>
@@ -17134,7 +17192,14 @@
         <p:cNvGrpSpPr/>
         <p:nvPr/>
       </p:nvGrpSpPr>
-      <p:grpSpPr/>
+      <p:grpSpPr>
+        <a:xfrm>
+          <a:off x="0" y="0"/>
+          <a:ext cx="0" cy="0"/>
+          <a:chOff x="0" y="0"/>
+          <a:chExt cx="0" cy="0"/>
+        </a:xfrm>
+      </p:grpSpPr>
       <p:sp>
         <p:nvSpPr>
           <p:cNvPr id="2" name="Rectangle 1"/>
@@ -17175,6 +17240,7 @@
           <a:lstStyle/>
           <a:p>
             <a:pPr algn="ctr"/>
+            <a:endParaRPr/>
           </a:p>
         </p:txBody>
       </p:sp>
@@ -17253,6 +17319,7 @@
           <a:lstStyle/>
           <a:p>
             <a:pPr algn="ctr"/>
+            <a:endParaRPr/>
           </a:p>
         </p:txBody>
       </p:sp>
@@ -17296,6 +17363,7 @@
           <a:lstStyle/>
           <a:p>
             <a:pPr algn="ctr"/>
+            <a:endParaRPr/>
           </a:p>
         </p:txBody>
       </p:sp>
@@ -17374,6 +17442,7 @@
           <a:lstStyle/>
           <a:p>
             <a:pPr algn="ctr"/>
+            <a:endParaRPr/>
           </a:p>
         </p:txBody>
       </p:sp>
@@ -17524,6 +17593,7 @@
           <a:lstStyle/>
           <a:p>
             <a:pPr algn="ctr"/>
+            <a:endParaRPr/>
           </a:p>
         </p:txBody>
       </p:sp>
@@ -17567,6 +17637,7 @@
           <a:lstStyle/>
           <a:p>
             <a:pPr algn="ctr"/>
+            <a:endParaRPr/>
           </a:p>
         </p:txBody>
       </p:sp>
@@ -17647,6 +17718,7 @@
           <a:lstStyle/>
           <a:p>
             <a:pPr algn="ctr"/>
+            <a:endParaRPr/>
           </a:p>
         </p:txBody>
       </p:sp>
@@ -17797,6 +17869,7 @@
           <a:lstStyle/>
           <a:p>
             <a:pPr algn="ctr"/>
+            <a:endParaRPr/>
           </a:p>
         </p:txBody>
       </p:sp>
@@ -17947,6 +18020,7 @@
           <a:lstStyle/>
           <a:p>
             <a:pPr algn="ctr"/>
+            <a:endParaRPr/>
           </a:p>
         </p:txBody>
       </p:sp>
@@ -18097,6 +18171,7 @@
           <a:lstStyle/>
           <a:p>
             <a:pPr algn="ctr"/>
+            <a:endParaRPr/>
           </a:p>
         </p:txBody>
       </p:sp>
@@ -18247,6 +18322,7 @@
           <a:lstStyle/>
           <a:p>
             <a:pPr algn="ctr"/>
+            <a:endParaRPr/>
           </a:p>
         </p:txBody>
       </p:sp>
@@ -18397,6 +18473,7 @@
           <a:lstStyle/>
           <a:p>
             <a:pPr algn="ctr"/>
+            <a:endParaRPr/>
           </a:p>
         </p:txBody>
       </p:sp>
@@ -18440,6 +18517,7 @@
           <a:lstStyle/>
           <a:p>
             <a:pPr algn="ctr"/>
+            <a:endParaRPr/>
           </a:p>
         </p:txBody>
       </p:sp>
@@ -18520,6 +18598,7 @@
           <a:lstStyle/>
           <a:p>
             <a:pPr algn="ctr"/>
+            <a:endParaRPr/>
           </a:p>
         </p:txBody>
       </p:sp>
@@ -18670,6 +18749,7 @@
           <a:lstStyle/>
           <a:p>
             <a:pPr algn="ctr"/>
+            <a:endParaRPr/>
           </a:p>
         </p:txBody>
       </p:sp>
@@ -18820,6 +18900,7 @@
           <a:lstStyle/>
           <a:p>
             <a:pPr algn="ctr"/>
+            <a:endParaRPr/>
           </a:p>
         </p:txBody>
       </p:sp>
@@ -18970,6 +19051,7 @@
           <a:lstStyle/>
           <a:p>
             <a:pPr algn="ctr"/>
+            <a:endParaRPr/>
           </a:p>
         </p:txBody>
       </p:sp>
@@ -19120,6 +19202,7 @@
           <a:lstStyle/>
           <a:p>
             <a:pPr algn="ctr"/>
+            <a:endParaRPr/>
           </a:p>
         </p:txBody>
       </p:sp>
@@ -19270,6 +19353,7 @@
           <a:lstStyle/>
           <a:p>
             <a:pPr algn="ctr"/>
+            <a:endParaRPr/>
           </a:p>
         </p:txBody>
       </p:sp>
@@ -19385,6 +19469,7 @@
           <a:lstStyle/>
           <a:p>
             <a:pPr algn="ctr"/>
+            <a:endParaRPr/>
           </a:p>
         </p:txBody>
       </p:sp>
@@ -19428,6 +19513,7 @@
           <a:lstStyle/>
           <a:p>
             <a:pPr algn="ctr"/>
+            <a:endParaRPr/>
           </a:p>
         </p:txBody>
       </p:sp>
@@ -19591,6 +19677,7 @@
           <a:lstStyle/>
           <a:p>
             <a:pPr algn="ctr"/>
+            <a:endParaRPr/>
           </a:p>
         </p:txBody>
       </p:sp>
@@ -19634,6 +19721,7 @@
           <a:lstStyle/>
           <a:p>
             <a:pPr algn="ctr"/>
+            <a:endParaRPr/>
           </a:p>
         </p:txBody>
       </p:sp>
@@ -19780,7 +19868,7 @@
 </file>
 
 <file path=ppt/slides/slide6.xml><?xml version="1.0" encoding="utf-8"?>
-<p:sld xmlns:a="http://schemas.openxmlformats.org/drawingml/2006/main" xmlns:p="http://schemas.openxmlformats.org/presentationml/2006/main" xmlns:r="http://schemas.openxmlformats.org/officeDocument/2006/relationships">
+<p:sld xmlns:a="http://schemas.openxmlformats.org/drawingml/2006/main" xmlns:r="http://schemas.openxmlformats.org/officeDocument/2006/relationships" xmlns:p="http://schemas.openxmlformats.org/presentationml/2006/main">
   <p:cSld>
     <p:bg>
       <p:bgPr>
@@ -19796,7 +19884,14 @@
         <p:cNvGrpSpPr/>
         <p:nvPr/>
       </p:nvGrpSpPr>
-      <p:grpSpPr/>
+      <p:grpSpPr>
+        <a:xfrm>
+          <a:off x="0" y="0"/>
+          <a:ext cx="0" cy="0"/>
+          <a:chOff x="0" y="0"/>
+          <a:chExt cx="0" cy="0"/>
+        </a:xfrm>
+      </p:grpSpPr>
       <p:sp>
         <p:nvSpPr>
           <p:cNvPr id="2" name="Rectangle 1"/>
@@ -19837,6 +19932,7 @@
           <a:lstStyle/>
           <a:p>
             <a:pPr algn="ctr"/>
+            <a:endParaRPr/>
           </a:p>
         </p:txBody>
       </p:sp>
@@ -19915,6 +20011,7 @@
           <a:lstStyle/>
           <a:p>
             <a:pPr algn="ctr"/>
+            <a:endParaRPr/>
           </a:p>
         </p:txBody>
       </p:sp>
@@ -19958,6 +20055,7 @@
           <a:lstStyle/>
           <a:p>
             <a:pPr algn="ctr"/>
+            <a:endParaRPr/>
           </a:p>
         </p:txBody>
       </p:sp>
@@ -20036,6 +20134,7 @@
           <a:lstStyle/>
           <a:p>
             <a:pPr algn="ctr"/>
+            <a:endParaRPr/>
           </a:p>
         </p:txBody>
       </p:sp>
@@ -20186,6 +20285,7 @@
           <a:lstStyle/>
           <a:p>
             <a:pPr algn="ctr"/>
+            <a:endParaRPr/>
           </a:p>
         </p:txBody>
       </p:sp>
@@ -20229,6 +20329,7 @@
           <a:lstStyle/>
           <a:p>
             <a:pPr algn="ctr"/>
+            <a:endParaRPr/>
           </a:p>
         </p:txBody>
       </p:sp>
@@ -20309,6 +20410,7 @@
           <a:lstStyle/>
           <a:p>
             <a:pPr algn="ctr"/>
+            <a:endParaRPr/>
           </a:p>
         </p:txBody>
       </p:sp>
@@ -20459,6 +20561,7 @@
           <a:lstStyle/>
           <a:p>
             <a:pPr algn="ctr"/>
+            <a:endParaRPr/>
           </a:p>
         </p:txBody>
       </p:sp>
@@ -20609,6 +20712,7 @@
           <a:lstStyle/>
           <a:p>
             <a:pPr algn="ctr"/>
+            <a:endParaRPr/>
           </a:p>
         </p:txBody>
       </p:sp>
@@ -20759,6 +20863,7 @@
           <a:lstStyle/>
           <a:p>
             <a:pPr algn="ctr"/>
+            <a:endParaRPr/>
           </a:p>
         </p:txBody>
       </p:sp>
@@ -20909,6 +21014,7 @@
           <a:lstStyle/>
           <a:p>
             <a:pPr algn="ctr"/>
+            <a:endParaRPr/>
           </a:p>
         </p:txBody>
       </p:sp>
@@ -21059,6 +21165,7 @@
           <a:lstStyle/>
           <a:p>
             <a:pPr algn="ctr"/>
+            <a:endParaRPr/>
           </a:p>
         </p:txBody>
       </p:sp>
@@ -21209,6 +21316,7 @@
           <a:lstStyle/>
           <a:p>
             <a:pPr algn="ctr"/>
+            <a:endParaRPr/>
           </a:p>
         </p:txBody>
       </p:sp>
@@ -21252,6 +21360,7 @@
           <a:lstStyle/>
           <a:p>
             <a:pPr algn="ctr"/>
+            <a:endParaRPr/>
           </a:p>
         </p:txBody>
       </p:sp>
@@ -21332,6 +21441,7 @@
           <a:lstStyle/>
           <a:p>
             <a:pPr algn="ctr"/>
+            <a:endParaRPr/>
           </a:p>
         </p:txBody>
       </p:sp>
@@ -21482,6 +21592,7 @@
           <a:lstStyle/>
           <a:p>
             <a:pPr algn="ctr"/>
+            <a:endParaRPr/>
           </a:p>
         </p:txBody>
       </p:sp>
@@ -21632,6 +21743,7 @@
           <a:lstStyle/>
           <a:p>
             <a:pPr algn="ctr"/>
+            <a:endParaRPr/>
           </a:p>
         </p:txBody>
       </p:sp>
@@ -21782,6 +21894,7 @@
           <a:lstStyle/>
           <a:p>
             <a:pPr algn="ctr"/>
+            <a:endParaRPr/>
           </a:p>
         </p:txBody>
       </p:sp>
@@ -21932,6 +22045,7 @@
           <a:lstStyle/>
           <a:p>
             <a:pPr algn="ctr"/>
+            <a:endParaRPr/>
           </a:p>
         </p:txBody>
       </p:sp>
@@ -22082,6 +22196,7 @@
           <a:lstStyle/>
           <a:p>
             <a:pPr algn="ctr"/>
+            <a:endParaRPr/>
           </a:p>
         </p:txBody>
       </p:sp>
@@ -22232,6 +22347,7 @@
           <a:lstStyle/>
           <a:p>
             <a:pPr algn="ctr"/>
+            <a:endParaRPr/>
           </a:p>
         </p:txBody>
       </p:sp>
@@ -22275,6 +22391,7 @@
           <a:lstStyle/>
           <a:p>
             <a:pPr algn="ctr"/>
+            <a:endParaRPr/>
           </a:p>
         </p:txBody>
       </p:sp>
@@ -22355,6 +22472,7 @@
           <a:lstStyle/>
           <a:p>
             <a:pPr algn="ctr"/>
+            <a:endParaRPr/>
           </a:p>
         </p:txBody>
       </p:sp>
@@ -22505,6 +22623,7 @@
           <a:lstStyle/>
           <a:p>
             <a:pPr algn="ctr"/>
+            <a:endParaRPr/>
           </a:p>
         </p:txBody>
       </p:sp>
@@ -22567,7 +22686,7 @@
           <a:p>
             <a:pPr algn="l"/>
             <a:r>
-              <a:rPr sz="1000" b="1" i="0">
+              <a:rPr sz="1000" b="1" i="0" dirty="0">
                 <a:solidFill>
                   <a:srgbClr val="0D1B3E"/>
                 </a:solidFill>
@@ -22655,6 +22774,7 @@
           <a:lstStyle/>
           <a:p>
             <a:pPr algn="ctr"/>
+            <a:endParaRPr/>
           </a:p>
         </p:txBody>
       </p:sp>
@@ -22752,7 +22872,7 @@
           <a:p>
             <a:pPr algn="l"/>
             <a:r>
-              <a:rPr sz="850" b="0" i="0">
+              <a:rPr sz="850" b="0" i="0" dirty="0">
                 <a:solidFill>
                   <a:srgbClr val="334455"/>
                 </a:solidFill>
@@ -22805,6 +22925,7 @@
           <a:lstStyle/>
           <a:p>
             <a:pPr algn="ctr"/>
+            <a:endParaRPr/>
           </a:p>
         </p:txBody>
       </p:sp>
@@ -22955,6 +23076,7 @@
           <a:lstStyle/>
           <a:p>
             <a:pPr algn="ctr"/>
+            <a:endParaRPr/>
           </a:p>
         </p:txBody>
       </p:sp>
@@ -23105,6 +23227,7 @@
           <a:lstStyle/>
           <a:p>
             <a:pPr algn="ctr"/>
+            <a:endParaRPr/>
           </a:p>
         </p:txBody>
       </p:sp>
@@ -23222,7 +23345,7 @@
 </file>
 
 <file path=ppt/slides/slide7.xml><?xml version="1.0" encoding="utf-8"?>
-<p:sld xmlns:a="http://schemas.openxmlformats.org/drawingml/2006/main" xmlns:p="http://schemas.openxmlformats.org/presentationml/2006/main" xmlns:r="http://schemas.openxmlformats.org/officeDocument/2006/relationships">
+<p:sld xmlns:a="http://schemas.openxmlformats.org/drawingml/2006/main" xmlns:r="http://schemas.openxmlformats.org/officeDocument/2006/relationships" xmlns:p="http://schemas.openxmlformats.org/presentationml/2006/main">
   <p:cSld>
     <p:bg>
       <p:bgPr>
@@ -23238,7 +23361,14 @@
         <p:cNvGrpSpPr/>
         <p:nvPr/>
       </p:nvGrpSpPr>
-      <p:grpSpPr/>
+      <p:grpSpPr>
+        <a:xfrm>
+          <a:off x="0" y="0"/>
+          <a:ext cx="0" cy="0"/>
+          <a:chOff x="0" y="0"/>
+          <a:chExt cx="0" cy="0"/>
+        </a:xfrm>
+      </p:grpSpPr>
       <p:sp>
         <p:nvSpPr>
           <p:cNvPr id="2" name="Rectangle 1"/>
@@ -23279,6 +23409,7 @@
           <a:lstStyle/>
           <a:p>
             <a:pPr algn="ctr"/>
+            <a:endParaRPr/>
           </a:p>
         </p:txBody>
       </p:sp>
@@ -23357,6 +23488,7 @@
           <a:lstStyle/>
           <a:p>
             <a:pPr algn="ctr"/>
+            <a:endParaRPr/>
           </a:p>
         </p:txBody>
       </p:sp>
@@ -23400,6 +23532,7 @@
           <a:lstStyle/>
           <a:p>
             <a:pPr algn="ctr"/>
+            <a:endParaRPr/>
           </a:p>
         </p:txBody>
       </p:sp>
@@ -23478,6 +23611,7 @@
           <a:lstStyle/>
           <a:p>
             <a:pPr algn="ctr"/>
+            <a:endParaRPr/>
           </a:p>
         </p:txBody>
       </p:sp>
@@ -23628,6 +23762,7 @@
           <a:lstStyle/>
           <a:p>
             <a:pPr algn="ctr"/>
+            <a:endParaRPr/>
           </a:p>
         </p:txBody>
       </p:sp>
@@ -23671,6 +23806,7 @@
           <a:lstStyle/>
           <a:p>
             <a:pPr algn="ctr"/>
+            <a:endParaRPr/>
           </a:p>
         </p:txBody>
       </p:sp>
@@ -23749,6 +23885,7 @@
           <a:lstStyle/>
           <a:p>
             <a:pPr algn="ctr"/>
+            <a:endParaRPr/>
           </a:p>
         </p:txBody>
       </p:sp>
@@ -23862,6 +23999,7 @@
           <a:lstStyle/>
           <a:p>
             <a:pPr algn="ctr"/>
+            <a:endParaRPr/>
           </a:p>
         </p:txBody>
       </p:sp>
@@ -23975,6 +24113,7 @@
           <a:lstStyle/>
           <a:p>
             <a:pPr algn="ctr"/>
+            <a:endParaRPr/>
           </a:p>
         </p:txBody>
       </p:sp>
@@ -24088,6 +24227,7 @@
           <a:lstStyle/>
           <a:p>
             <a:pPr algn="ctr"/>
+            <a:endParaRPr/>
           </a:p>
         </p:txBody>
       </p:sp>
@@ -24201,6 +24341,7 @@
           <a:lstStyle/>
           <a:p>
             <a:pPr algn="ctr"/>
+            <a:endParaRPr/>
           </a:p>
         </p:txBody>
       </p:sp>
@@ -24314,6 +24455,7 @@
           <a:lstStyle/>
           <a:p>
             <a:pPr algn="ctr"/>
+            <a:endParaRPr/>
           </a:p>
         </p:txBody>
       </p:sp>
@@ -24427,6 +24569,7 @@
           <a:lstStyle/>
           <a:p>
             <a:pPr algn="ctr"/>
+            <a:endParaRPr/>
           </a:p>
         </p:txBody>
       </p:sp>
@@ -24540,6 +24683,7 @@
           <a:lstStyle/>
           <a:p>
             <a:pPr algn="ctr"/>
+            <a:endParaRPr/>
           </a:p>
         </p:txBody>
       </p:sp>
@@ -24653,6 +24797,7 @@
           <a:lstStyle/>
           <a:p>
             <a:pPr algn="ctr"/>
+            <a:endParaRPr/>
           </a:p>
         </p:txBody>
       </p:sp>
@@ -24766,6 +24911,7 @@
           <a:lstStyle/>
           <a:p>
             <a:pPr algn="ctr"/>
+            <a:endParaRPr/>
           </a:p>
         </p:txBody>
       </p:sp>
@@ -24881,6 +25027,7 @@
           <a:lstStyle/>
           <a:p>
             <a:pPr algn="ctr"/>
+            <a:endParaRPr/>
           </a:p>
         </p:txBody>
       </p:sp>
@@ -24924,6 +25071,7 @@
           <a:lstStyle/>
           <a:p>
             <a:pPr algn="ctr"/>
+            <a:endParaRPr/>
           </a:p>
         </p:txBody>
       </p:sp>
@@ -25004,6 +25152,7 @@
           <a:lstStyle/>
           <a:p>
             <a:pPr algn="ctr"/>
+            <a:endParaRPr/>
           </a:p>
         </p:txBody>
       </p:sp>
@@ -25047,6 +25196,7 @@
           <a:lstStyle/>
           <a:p>
             <a:pPr algn="ctr"/>
+            <a:endParaRPr/>
           </a:p>
         </p:txBody>
       </p:sp>
@@ -25163,6 +25313,7 @@
           <a:lstStyle/>
           <a:p>
             <a:pPr algn="ctr"/>
+            <a:endParaRPr/>
           </a:p>
         </p:txBody>
       </p:sp>
@@ -25206,6 +25357,7 @@
           <a:lstStyle/>
           <a:p>
             <a:pPr algn="ctr"/>
+            <a:endParaRPr/>
           </a:p>
         </p:txBody>
       </p:sp>
@@ -25322,6 +25474,7 @@
           <a:lstStyle/>
           <a:p>
             <a:pPr algn="ctr"/>
+            <a:endParaRPr/>
           </a:p>
         </p:txBody>
       </p:sp>
@@ -25365,6 +25518,7 @@
           <a:lstStyle/>
           <a:p>
             <a:pPr algn="ctr"/>
+            <a:endParaRPr/>
           </a:p>
         </p:txBody>
       </p:sp>
@@ -25481,6 +25635,7 @@
           <a:lstStyle/>
           <a:p>
             <a:pPr algn="ctr"/>
+            <a:endParaRPr/>
           </a:p>
         </p:txBody>
       </p:sp>
@@ -25524,6 +25679,7 @@
           <a:lstStyle/>
           <a:p>
             <a:pPr algn="ctr"/>
+            <a:endParaRPr/>
           </a:p>
         </p:txBody>
       </p:sp>
@@ -25640,6 +25796,7 @@
           <a:lstStyle/>
           <a:p>
             <a:pPr algn="ctr"/>
+            <a:endParaRPr/>
           </a:p>
         </p:txBody>
       </p:sp>
@@ -25683,6 +25840,7 @@
           <a:lstStyle/>
           <a:p>
             <a:pPr algn="ctr"/>
+            <a:endParaRPr/>
           </a:p>
         </p:txBody>
       </p:sp>
@@ -25799,6 +25957,7 @@
           <a:lstStyle/>
           <a:p>
             <a:pPr algn="ctr"/>
+            <a:endParaRPr/>
           </a:p>
         </p:txBody>
       </p:sp>
@@ -25846,7 +26005,7 @@
 </file>
 
 <file path=ppt/slides/slide8.xml><?xml version="1.0" encoding="utf-8"?>
-<p:sld xmlns:a="http://schemas.openxmlformats.org/drawingml/2006/main" xmlns:p="http://schemas.openxmlformats.org/presentationml/2006/main" xmlns:r="http://schemas.openxmlformats.org/officeDocument/2006/relationships">
+<p:sld xmlns:a="http://schemas.openxmlformats.org/drawingml/2006/main" xmlns:r="http://schemas.openxmlformats.org/officeDocument/2006/relationships" xmlns:p="http://schemas.openxmlformats.org/presentationml/2006/main">
   <p:cSld>
     <p:bg>
       <p:bgPr>
@@ -25862,7 +26021,14 @@
         <p:cNvGrpSpPr/>
         <p:nvPr/>
       </p:nvGrpSpPr>
-      <p:grpSpPr/>
+      <p:grpSpPr>
+        <a:xfrm>
+          <a:off x="0" y="0"/>
+          <a:ext cx="0" cy="0"/>
+          <a:chOff x="0" y="0"/>
+          <a:chExt cx="0" cy="0"/>
+        </a:xfrm>
+      </p:grpSpPr>
       <p:sp>
         <p:nvSpPr>
           <p:cNvPr id="2" name="Rectangle 1"/>
@@ -25903,6 +26069,7 @@
           <a:lstStyle/>
           <a:p>
             <a:pPr algn="ctr"/>
+            <a:endParaRPr/>
           </a:p>
         </p:txBody>
       </p:sp>
@@ -25981,6 +26148,7 @@
           <a:lstStyle/>
           <a:p>
             <a:pPr algn="ctr"/>
+            <a:endParaRPr/>
           </a:p>
         </p:txBody>
       </p:sp>
@@ -26024,6 +26192,7 @@
           <a:lstStyle/>
           <a:p>
             <a:pPr algn="ctr"/>
+            <a:endParaRPr/>
           </a:p>
         </p:txBody>
       </p:sp>
@@ -26102,6 +26271,7 @@
           <a:lstStyle/>
           <a:p>
             <a:pPr algn="ctr"/>
+            <a:endParaRPr/>
           </a:p>
         </p:txBody>
       </p:sp>
@@ -26252,6 +26422,7 @@
           <a:lstStyle/>
           <a:p>
             <a:pPr algn="ctr"/>
+            <a:endParaRPr/>
           </a:p>
         </p:txBody>
       </p:sp>
@@ -26295,6 +26466,7 @@
           <a:lstStyle/>
           <a:p>
             <a:pPr algn="ctr"/>
+            <a:endParaRPr/>
           </a:p>
         </p:txBody>
       </p:sp>
@@ -26445,6 +26617,7 @@
           <a:lstStyle/>
           <a:p>
             <a:pPr algn="ctr"/>
+            <a:endParaRPr/>
           </a:p>
         </p:txBody>
       </p:sp>
@@ -26488,6 +26661,7 @@
           <a:lstStyle/>
           <a:p>
             <a:pPr algn="ctr"/>
+            <a:endParaRPr/>
           </a:p>
         </p:txBody>
       </p:sp>
@@ -26638,6 +26812,7 @@
           <a:lstStyle/>
           <a:p>
             <a:pPr algn="ctr"/>
+            <a:endParaRPr/>
           </a:p>
         </p:txBody>
       </p:sp>
@@ -26681,6 +26856,7 @@
           <a:lstStyle/>
           <a:p>
             <a:pPr algn="ctr"/>
+            <a:endParaRPr/>
           </a:p>
         </p:txBody>
       </p:sp>
@@ -26831,6 +27007,7 @@
           <a:lstStyle/>
           <a:p>
             <a:pPr algn="ctr"/>
+            <a:endParaRPr/>
           </a:p>
         </p:txBody>
       </p:sp>
@@ -26874,6 +27051,7 @@
           <a:lstStyle/>
           <a:p>
             <a:pPr algn="ctr"/>
+            <a:endParaRPr/>
           </a:p>
         </p:txBody>
       </p:sp>
@@ -27024,6 +27202,7 @@
           <a:lstStyle/>
           <a:p>
             <a:pPr algn="ctr"/>
+            <a:endParaRPr/>
           </a:p>
         </p:txBody>
       </p:sp>
@@ -27067,6 +27246,7 @@
           <a:lstStyle/>
           <a:p>
             <a:pPr algn="ctr"/>
+            <a:endParaRPr/>
           </a:p>
         </p:txBody>
       </p:sp>
@@ -27394,7 +27574,7 @@
 </file>
 
 <file path=ppt/slides/slide9.xml><?xml version="1.0" encoding="utf-8"?>
-<p:sld xmlns:a="http://schemas.openxmlformats.org/drawingml/2006/main" xmlns:p="http://schemas.openxmlformats.org/presentationml/2006/main" xmlns:r="http://schemas.openxmlformats.org/officeDocument/2006/relationships">
+<p:sld xmlns:a="http://schemas.openxmlformats.org/drawingml/2006/main" xmlns:r="http://schemas.openxmlformats.org/officeDocument/2006/relationships" xmlns:p="http://schemas.openxmlformats.org/presentationml/2006/main">
   <p:cSld>
     <p:bg>
       <p:bgPr>
@@ -27410,7 +27590,14 @@
         <p:cNvGrpSpPr/>
         <p:nvPr/>
       </p:nvGrpSpPr>
-      <p:grpSpPr/>
+      <p:grpSpPr>
+        <a:xfrm>
+          <a:off x="0" y="0"/>
+          <a:ext cx="0" cy="0"/>
+          <a:chOff x="0" y="0"/>
+          <a:chExt cx="0" cy="0"/>
+        </a:xfrm>
+      </p:grpSpPr>
       <p:sp>
         <p:nvSpPr>
           <p:cNvPr id="2" name="Rectangle 1"/>
@@ -27451,6 +27638,7 @@
           <a:lstStyle/>
           <a:p>
             <a:pPr algn="ctr"/>
+            <a:endParaRPr/>
           </a:p>
         </p:txBody>
       </p:sp>
@@ -27529,6 +27717,7 @@
           <a:lstStyle/>
           <a:p>
             <a:pPr algn="ctr"/>
+            <a:endParaRPr/>
           </a:p>
         </p:txBody>
       </p:sp>
@@ -27572,6 +27761,7 @@
           <a:lstStyle/>
           <a:p>
             <a:pPr algn="ctr"/>
+            <a:endParaRPr/>
           </a:p>
         </p:txBody>
       </p:sp>
@@ -27650,6 +27840,7 @@
           <a:lstStyle/>
           <a:p>
             <a:pPr algn="ctr"/>
+            <a:endParaRPr/>
           </a:p>
         </p:txBody>
       </p:sp>
@@ -27800,6 +27991,7 @@
           <a:lstStyle/>
           <a:p>
             <a:pPr algn="ctr"/>
+            <a:endParaRPr/>
           </a:p>
         </p:txBody>
       </p:sp>
@@ -27843,6 +28035,7 @@
           <a:lstStyle/>
           <a:p>
             <a:pPr algn="ctr"/>
+            <a:endParaRPr/>
           </a:p>
         </p:txBody>
       </p:sp>
@@ -27959,6 +28152,7 @@
           <a:lstStyle/>
           <a:p>
             <a:pPr algn="ctr"/>
+            <a:endParaRPr/>
           </a:p>
         </p:txBody>
       </p:sp>
@@ -28002,6 +28196,7 @@
           <a:lstStyle/>
           <a:p>
             <a:pPr algn="ctr"/>
+            <a:endParaRPr/>
           </a:p>
         </p:txBody>
       </p:sp>
@@ -28118,6 +28313,7 @@
           <a:lstStyle/>
           <a:p>
             <a:pPr algn="ctr"/>
+            <a:endParaRPr/>
           </a:p>
         </p:txBody>
       </p:sp>
@@ -28161,6 +28357,7 @@
           <a:lstStyle/>
           <a:p>
             <a:pPr algn="ctr"/>
+            <a:endParaRPr/>
           </a:p>
         </p:txBody>
       </p:sp>
@@ -28277,6 +28474,7 @@
           <a:lstStyle/>
           <a:p>
             <a:pPr algn="ctr"/>
+            <a:endParaRPr/>
           </a:p>
         </p:txBody>
       </p:sp>
@@ -28320,6 +28518,7 @@
           <a:lstStyle/>
           <a:p>
             <a:pPr algn="ctr"/>
+            <a:endParaRPr/>
           </a:p>
         </p:txBody>
       </p:sp>
@@ -28436,6 +28635,7 @@
           <a:lstStyle/>
           <a:p>
             <a:pPr algn="ctr"/>
+            <a:endParaRPr/>
           </a:p>
         </p:txBody>
       </p:sp>
@@ -28479,6 +28679,7 @@
           <a:lstStyle/>
           <a:p>
             <a:pPr algn="ctr"/>
+            <a:endParaRPr/>
           </a:p>
         </p:txBody>
       </p:sp>
@@ -28642,6 +28843,7 @@
           <a:lstStyle/>
           <a:p>
             <a:pPr algn="ctr"/>
+            <a:endParaRPr/>
           </a:p>
         </p:txBody>
       </p:sp>
@@ -28685,6 +28887,7 @@
           <a:lstStyle/>
           <a:p>
             <a:pPr algn="ctr"/>
+            <a:endParaRPr/>
           </a:p>
         </p:txBody>
       </p:sp>
@@ -28848,6 +29051,7 @@
           <a:lstStyle/>
           <a:p>
             <a:pPr algn="ctr"/>
+            <a:endParaRPr/>
           </a:p>
         </p:txBody>
       </p:sp>
@@ -28891,6 +29095,7 @@
           <a:lstStyle/>
           <a:p>
             <a:pPr algn="ctr"/>
+            <a:endParaRPr/>
           </a:p>
         </p:txBody>
       </p:sp>
